--- a/sharpen_axe.pptx
+++ b/sharpen_axe.pptx
@@ -13,6 +13,7 @@
     <p:sldId id="266" r:id="rId7"/>
     <p:sldId id="263" r:id="rId8"/>
     <p:sldId id="267" r:id="rId9"/>
+    <p:sldId id="269" r:id="rId10"/>
   </p:sldIdLst>
   <p:sldSz cx="12192000" cy="6858000"/>
   <p:notesSz cx="6858000" cy="9144000"/>
@@ -265,7 +266,7 @@
           <a:lstStyle/>
           <a:p>
             <a:fld id="{5F491023-0B0A-7041-9F06-D25A50EF063B}" type="datetimeFigureOut">
-              <a:t>10/18/22</a:t>
+              <a:t>10/19/22</a:t>
             </a:fld>
             <a:endParaRPr lang="en-US"/>
           </a:p>
@@ -461,7 +462,7 @@
           <a:lstStyle/>
           <a:p>
             <a:fld id="{5F491023-0B0A-7041-9F06-D25A50EF063B}" type="datetimeFigureOut">
-              <a:t>10/18/22</a:t>
+              <a:t>10/19/22</a:t>
             </a:fld>
             <a:endParaRPr lang="en-US"/>
           </a:p>
@@ -667,7 +668,7 @@
           <a:lstStyle/>
           <a:p>
             <a:fld id="{5F491023-0B0A-7041-9F06-D25A50EF063B}" type="datetimeFigureOut">
-              <a:t>10/18/22</a:t>
+              <a:t>10/19/22</a:t>
             </a:fld>
             <a:endParaRPr lang="en-US"/>
           </a:p>
@@ -863,7 +864,7 @@
           <a:lstStyle/>
           <a:p>
             <a:fld id="{5F491023-0B0A-7041-9F06-D25A50EF063B}" type="datetimeFigureOut">
-              <a:t>10/18/22</a:t>
+              <a:t>10/19/22</a:t>
             </a:fld>
             <a:endParaRPr lang="en-US"/>
           </a:p>
@@ -1136,7 +1137,7 @@
           <a:lstStyle/>
           <a:p>
             <a:fld id="{5F491023-0B0A-7041-9F06-D25A50EF063B}" type="datetimeFigureOut">
-              <a:t>10/18/22</a:t>
+              <a:t>10/19/22</a:t>
             </a:fld>
             <a:endParaRPr lang="en-US"/>
           </a:p>
@@ -1399,7 +1400,7 @@
           <a:lstStyle/>
           <a:p>
             <a:fld id="{5F491023-0B0A-7041-9F06-D25A50EF063B}" type="datetimeFigureOut">
-              <a:t>10/18/22</a:t>
+              <a:t>10/19/22</a:t>
             </a:fld>
             <a:endParaRPr lang="en-US"/>
           </a:p>
@@ -1809,7 +1810,7 @@
           <a:lstStyle/>
           <a:p>
             <a:fld id="{5F491023-0B0A-7041-9F06-D25A50EF063B}" type="datetimeFigureOut">
-              <a:t>10/18/22</a:t>
+              <a:t>10/19/22</a:t>
             </a:fld>
             <a:endParaRPr lang="en-US"/>
           </a:p>
@@ -1948,7 +1949,7 @@
           <a:lstStyle/>
           <a:p>
             <a:fld id="{5F491023-0B0A-7041-9F06-D25A50EF063B}" type="datetimeFigureOut">
-              <a:t>10/18/22</a:t>
+              <a:t>10/19/22</a:t>
             </a:fld>
             <a:endParaRPr lang="en-US"/>
           </a:p>
@@ -2059,7 +2060,7 @@
           <a:lstStyle/>
           <a:p>
             <a:fld id="{5F491023-0B0A-7041-9F06-D25A50EF063B}" type="datetimeFigureOut">
-              <a:t>10/18/22</a:t>
+              <a:t>10/19/22</a:t>
             </a:fld>
             <a:endParaRPr lang="en-US"/>
           </a:p>
@@ -2368,7 +2369,7 @@
           <a:lstStyle/>
           <a:p>
             <a:fld id="{5F491023-0B0A-7041-9F06-D25A50EF063B}" type="datetimeFigureOut">
-              <a:t>10/18/22</a:t>
+              <a:t>10/19/22</a:t>
             </a:fld>
             <a:endParaRPr lang="en-US"/>
           </a:p>
@@ -2654,7 +2655,7 @@
           <a:lstStyle/>
           <a:p>
             <a:fld id="{5F491023-0B0A-7041-9F06-D25A50EF063B}" type="datetimeFigureOut">
-              <a:t>10/18/22</a:t>
+              <a:t>10/19/22</a:t>
             </a:fld>
             <a:endParaRPr lang="en-US"/>
           </a:p>
@@ -2893,7 +2894,7 @@
           </a:lstStyle>
           <a:p>
             <a:fld id="{5F491023-0B0A-7041-9F06-D25A50EF063B}" type="datetimeFigureOut">
-              <a:t>10/18/22</a:t>
+              <a:t>10/19/22</a:t>
             </a:fld>
             <a:endParaRPr lang="en-US"/>
           </a:p>
@@ -4338,6 +4339,143 @@
           </a:p>
         </p:txBody>
       </p:sp>
+      <p:pic>
+        <p:nvPicPr>
+          <p:cNvPr id="10" name="Picture 9">
+            <a:extLst>
+              <a:ext uri="{FF2B5EF4-FFF2-40B4-BE49-F238E27FC236}">
+                <a16:creationId xmlns:a16="http://schemas.microsoft.com/office/drawing/2014/main" id="{AE11B2E5-550A-C9EF-31C4-B192D1D5E00A}"/>
+              </a:ext>
+            </a:extLst>
+          </p:cNvPr>
+          <p:cNvPicPr>
+            <a:picLocks noChangeAspect="1"/>
+          </p:cNvPicPr>
+          <p:nvPr/>
+        </p:nvPicPr>
+        <p:blipFill>
+          <a:blip r:embed="rId6" cstate="email">
+            <a:extLst>
+              <a:ext uri="{28A0092B-C50C-407E-A947-70E740481C1C}">
+                <a14:useLocalDpi xmlns:a14="http://schemas.microsoft.com/office/drawing/2010/main"/>
+              </a:ext>
+            </a:extLst>
+          </a:blip>
+          <a:stretch>
+            <a:fillRect/>
+          </a:stretch>
+        </p:blipFill>
+        <p:spPr>
+          <a:xfrm>
+            <a:off x="5039396" y="4094487"/>
+            <a:ext cx="3619922" cy="1977065"/>
+          </a:xfrm>
+          <a:prstGeom prst="rect">
+            <a:avLst/>
+          </a:prstGeom>
+        </p:spPr>
+      </p:pic>
+      <p:sp>
+        <p:nvSpPr>
+          <p:cNvPr id="11" name="TextBox 10">
+            <a:extLst>
+              <a:ext uri="{FF2B5EF4-FFF2-40B4-BE49-F238E27FC236}">
+                <a16:creationId xmlns:a16="http://schemas.microsoft.com/office/drawing/2014/main" id="{558DF942-64A4-2ED4-B2C0-7AE7BF74D1BD}"/>
+              </a:ext>
+            </a:extLst>
+          </p:cNvPr>
+          <p:cNvSpPr txBox="1"/>
+          <p:nvPr/>
+        </p:nvSpPr>
+        <p:spPr>
+          <a:xfrm>
+            <a:off x="5039396" y="6155651"/>
+            <a:ext cx="3619922" cy="461665"/>
+          </a:xfrm>
+          <a:prstGeom prst="rect">
+            <a:avLst/>
+          </a:prstGeom>
+          <a:noFill/>
+        </p:spPr>
+        <p:txBody>
+          <a:bodyPr wrap="square" rtlCol="0">
+            <a:spAutoFit/>
+          </a:bodyPr>
+          <a:lstStyle/>
+          <a:p>
+            <a:pPr algn="ctr"/>
+            <a:r>
+              <a:rPr lang="en-US" sz="1200">
+                <a:hlinkClick r:id="rId7"/>
+              </a:rPr>
+              <a:t>https://www.youtube.com/watch?v=AH5QCROvn28</a:t>
+            </a:r>
+            <a:r>
+              <a:rPr lang="en-US" sz="1200"/>
+              <a:t> </a:t>
+            </a:r>
+          </a:p>
+          <a:p>
+            <a:pPr algn="ctr"/>
+            <a:r>
+              <a:rPr lang="en-US" sz="1200"/>
+              <a:t>using </a:t>
+            </a:r>
+            <a:r>
+              <a:rPr lang="en-US" sz="1200" i="0">
+                <a:effectLst/>
+              </a:rPr>
+              <a:t>homemade guided knife sharpener</a:t>
+            </a:r>
+            <a:endParaRPr lang="en-US" sz="1200"/>
+          </a:p>
+        </p:txBody>
+      </p:sp>
+      <p:cxnSp>
+        <p:nvCxnSpPr>
+          <p:cNvPr id="13" name="Straight Arrow Connector 12">
+            <a:extLst>
+              <a:ext uri="{FF2B5EF4-FFF2-40B4-BE49-F238E27FC236}">
+                <a16:creationId xmlns:a16="http://schemas.microsoft.com/office/drawing/2014/main" id="{44654206-A2CF-D70C-1FE9-E4FE82DF97A7}"/>
+              </a:ext>
+            </a:extLst>
+          </p:cNvPr>
+          <p:cNvCxnSpPr>
+            <a:cxnSpLocks/>
+          </p:cNvCxnSpPr>
+          <p:nvPr/>
+        </p:nvCxnSpPr>
+        <p:spPr>
+          <a:xfrm flipV="1">
+            <a:off x="6626152" y="4208929"/>
+            <a:ext cx="917648" cy="310083"/>
+          </a:xfrm>
+          <a:prstGeom prst="straightConnector1">
+            <a:avLst/>
+          </a:prstGeom>
+          <a:ln w="25400">
+            <a:solidFill>
+              <a:srgbClr val="FF0000"/>
+            </a:solidFill>
+            <a:headEnd type="triangle" w="lg" len="lg"/>
+            <a:tailEnd type="triangle" w="lg" len="lg"/>
+          </a:ln>
+        </p:spPr>
+        <p:style>
+          <a:lnRef idx="1">
+            <a:schemeClr val="accent1"/>
+          </a:lnRef>
+          <a:fillRef idx="0">
+            <a:schemeClr val="accent1"/>
+          </a:fillRef>
+          <a:effectRef idx="0">
+            <a:schemeClr val="accent1"/>
+          </a:effectRef>
+          <a:fontRef idx="minor">
+            <a:schemeClr val="tx1"/>
+          </a:fontRef>
+        </p:style>
+      </p:cxnSp>
     </p:spTree>
     <p:extLst>
       <p:ext uri="{BB962C8B-B14F-4D97-AF65-F5344CB8AC3E}">
@@ -6520,6 +6658,536 @@
     <p:extLst>
       <p:ext uri="{BB962C8B-B14F-4D97-AF65-F5344CB8AC3E}">
         <p14:creationId xmlns:p14="http://schemas.microsoft.com/office/powerpoint/2010/main" val="1619744340"/>
+      </p:ext>
+    </p:extLst>
+  </p:cSld>
+  <p:clrMapOvr>
+    <a:masterClrMapping/>
+  </p:clrMapOvr>
+</p:sld>
+</file>
+
+<file path=ppt/slides/slide9.xml><?xml version="1.0" encoding="utf-8"?>
+<p:sld xmlns:a="http://schemas.openxmlformats.org/drawingml/2006/main" xmlns:r="http://schemas.openxmlformats.org/officeDocument/2006/relationships" xmlns:p="http://schemas.openxmlformats.org/presentationml/2006/main">
+  <p:cSld>
+    <p:spTree>
+      <p:nvGrpSpPr>
+        <p:cNvPr id="1" name=""/>
+        <p:cNvGrpSpPr/>
+        <p:nvPr/>
+      </p:nvGrpSpPr>
+      <p:grpSpPr>
+        <a:xfrm>
+          <a:off x="0" y="0"/>
+          <a:ext cx="0" cy="0"/>
+          <a:chOff x="0" y="0"/>
+          <a:chExt cx="0" cy="0"/>
+        </a:xfrm>
+      </p:grpSpPr>
+      <p:sp>
+        <p:nvSpPr>
+          <p:cNvPr id="2" name="TextBox 1">
+            <a:extLst>
+              <a:ext uri="{FF2B5EF4-FFF2-40B4-BE49-F238E27FC236}">
+                <a16:creationId xmlns:a16="http://schemas.microsoft.com/office/drawing/2014/main" id="{520D4253-2ED8-0EB9-1C23-7F80EC3B9CD6}"/>
+              </a:ext>
+            </a:extLst>
+          </p:cNvPr>
+          <p:cNvSpPr txBox="1"/>
+          <p:nvPr/>
+        </p:nvSpPr>
+        <p:spPr>
+          <a:xfrm>
+            <a:off x="119269" y="705678"/>
+            <a:ext cx="4823792" cy="1384995"/>
+          </a:xfrm>
+          <a:prstGeom prst="rect">
+            <a:avLst/>
+          </a:prstGeom>
+          <a:solidFill>
+            <a:schemeClr val="accent4">
+              <a:lumMod val="20000"/>
+              <a:lumOff val="80000"/>
+            </a:schemeClr>
+          </a:solidFill>
+          <a:ln>
+            <a:solidFill>
+              <a:srgbClr val="FF0000"/>
+            </a:solidFill>
+          </a:ln>
+        </p:spPr>
+        <p:txBody>
+          <a:bodyPr wrap="square" rtlCol="0">
+            <a:spAutoFit/>
+          </a:bodyPr>
+          <a:lstStyle/>
+          <a:p>
+            <a:r>
+              <a:rPr lang="ru-RU" sz="1400"/>
+              <a:t>Па́ста ГОИ (от ГОИ — Государственный оптический институт) — шлифовальные и полировальные пасты на основе оксида хрома</a:t>
+            </a:r>
+            <a:r>
+              <a:rPr lang="en-US" sz="1400"/>
+              <a:t>, </a:t>
+            </a:r>
+            <a:r>
+              <a:rPr lang="ru-RU" sz="1400"/>
+              <a:t>используемые для шлифования и полирования стальных сплавов, цветных металлов, твёрдых пластмасс и полимеров, стёкол, оптических стёкол, керамических материалов.</a:t>
+            </a:r>
+            <a:endParaRPr lang="en-US" sz="1400"/>
+          </a:p>
+        </p:txBody>
+      </p:sp>
+      <p:sp>
+        <p:nvSpPr>
+          <p:cNvPr id="3" name="TextBox 2">
+            <a:extLst>
+              <a:ext uri="{FF2B5EF4-FFF2-40B4-BE49-F238E27FC236}">
+                <a16:creationId xmlns:a16="http://schemas.microsoft.com/office/drawing/2014/main" id="{027EFAC2-91F2-94C5-4A95-1C3A54E229A8}"/>
+              </a:ext>
+            </a:extLst>
+          </p:cNvPr>
+          <p:cNvSpPr txBox="1"/>
+          <p:nvPr/>
+        </p:nvSpPr>
+        <p:spPr>
+          <a:xfrm>
+            <a:off x="49695" y="69574"/>
+            <a:ext cx="1888435" cy="523220"/>
+          </a:xfrm>
+          <a:prstGeom prst="rect">
+            <a:avLst/>
+          </a:prstGeom>
+          <a:noFill/>
+        </p:spPr>
+        <p:txBody>
+          <a:bodyPr wrap="square" rtlCol="0">
+            <a:spAutoFit/>
+          </a:bodyPr>
+          <a:lstStyle/>
+          <a:p>
+            <a:r>
+              <a:rPr lang="ru-RU" sz="2800" b="1"/>
+              <a:t>Па́ста ГОИ</a:t>
+            </a:r>
+            <a:endParaRPr lang="en-US" sz="2800" b="1"/>
+          </a:p>
+        </p:txBody>
+      </p:sp>
+      <p:pic>
+        <p:nvPicPr>
+          <p:cNvPr id="1026" name="Picture 2">
+            <a:extLst>
+              <a:ext uri="{FF2B5EF4-FFF2-40B4-BE49-F238E27FC236}">
+                <a16:creationId xmlns:a16="http://schemas.microsoft.com/office/drawing/2014/main" id="{52A9AA8E-0192-5387-6900-2162B5872002}"/>
+              </a:ext>
+            </a:extLst>
+          </p:cNvPr>
+          <p:cNvPicPr>
+            <a:picLocks noChangeAspect="1" noChangeArrowheads="1"/>
+          </p:cNvPicPr>
+          <p:nvPr/>
+        </p:nvPicPr>
+        <p:blipFill>
+          <a:blip r:embed="rId2" cstate="email">
+            <a:extLst>
+              <a:ext uri="{28A0092B-C50C-407E-A947-70E740481C1C}">
+                <a14:useLocalDpi xmlns:a14="http://schemas.microsoft.com/office/drawing/2010/main"/>
+              </a:ext>
+            </a:extLst>
+          </a:blip>
+          <a:srcRect/>
+          <a:stretch>
+            <a:fillRect/>
+          </a:stretch>
+        </p:blipFill>
+        <p:spPr bwMode="auto">
+          <a:xfrm>
+            <a:off x="6096000" y="350377"/>
+            <a:ext cx="2421176" cy="1815882"/>
+          </a:xfrm>
+          <a:prstGeom prst="rect">
+            <a:avLst/>
+          </a:prstGeom>
+          <a:noFill/>
+          <a:extLst>
+            <a:ext uri="{909E8E84-426E-40DD-AFC4-6F175D3DCCD1}">
+              <a14:hiddenFill xmlns:a14="http://schemas.microsoft.com/office/drawing/2010/main">
+                <a:solidFill>
+                  <a:srgbClr val="FFFFFF"/>
+                </a:solidFill>
+              </a14:hiddenFill>
+            </a:ext>
+          </a:extLst>
+        </p:spPr>
+      </p:pic>
+      <p:sp>
+        <p:nvSpPr>
+          <p:cNvPr id="4" name="TextBox 3">
+            <a:extLst>
+              <a:ext uri="{FF2B5EF4-FFF2-40B4-BE49-F238E27FC236}">
+                <a16:creationId xmlns:a16="http://schemas.microsoft.com/office/drawing/2014/main" id="{25E1BB97-1967-4A2B-90E4-0EA23F9B338C}"/>
+              </a:ext>
+            </a:extLst>
+          </p:cNvPr>
+          <p:cNvSpPr txBox="1"/>
+          <p:nvPr/>
+        </p:nvSpPr>
+        <p:spPr>
+          <a:xfrm>
+            <a:off x="6378935" y="2166259"/>
+            <a:ext cx="1855305" cy="369332"/>
+          </a:xfrm>
+          <a:prstGeom prst="rect">
+            <a:avLst/>
+          </a:prstGeom>
+          <a:noFill/>
+        </p:spPr>
+        <p:txBody>
+          <a:bodyPr wrap="square" rtlCol="0">
+            <a:spAutoFit/>
+          </a:bodyPr>
+          <a:lstStyle/>
+          <a:p>
+            <a:r>
+              <a:rPr lang="ru-RU"/>
+              <a:t>Кусок пасты ГОИ</a:t>
+            </a:r>
+            <a:endParaRPr lang="en-US"/>
+          </a:p>
+        </p:txBody>
+      </p:sp>
+      <p:sp>
+        <p:nvSpPr>
+          <p:cNvPr id="5" name="TextBox 4">
+            <a:extLst>
+              <a:ext uri="{FF2B5EF4-FFF2-40B4-BE49-F238E27FC236}">
+                <a16:creationId xmlns:a16="http://schemas.microsoft.com/office/drawing/2014/main" id="{578348FC-CB01-20A8-208D-968A291B1030}"/>
+              </a:ext>
+            </a:extLst>
+          </p:cNvPr>
+          <p:cNvSpPr txBox="1"/>
+          <p:nvPr/>
+        </p:nvSpPr>
+        <p:spPr>
+          <a:xfrm>
+            <a:off x="119269" y="2782669"/>
+            <a:ext cx="4558748" cy="646331"/>
+          </a:xfrm>
+          <a:prstGeom prst="rect">
+            <a:avLst/>
+          </a:prstGeom>
+          <a:noFill/>
+        </p:spPr>
+        <p:txBody>
+          <a:bodyPr wrap="square" rtlCol="0">
+            <a:spAutoFit/>
+          </a:bodyPr>
+          <a:lstStyle/>
+          <a:p>
+            <a:r>
+              <a:rPr lang="en-US"/>
+              <a:t>There are multiple honing and polishing pastes and compounds on amazon</a:t>
+            </a:r>
+          </a:p>
+        </p:txBody>
+      </p:sp>
+      <p:sp>
+        <p:nvSpPr>
+          <p:cNvPr id="6" name="TextBox 5">
+            <a:extLst>
+              <a:ext uri="{FF2B5EF4-FFF2-40B4-BE49-F238E27FC236}">
+                <a16:creationId xmlns:a16="http://schemas.microsoft.com/office/drawing/2014/main" id="{43739B9B-E3BC-F4A8-10A9-860BFA040DA2}"/>
+              </a:ext>
+            </a:extLst>
+          </p:cNvPr>
+          <p:cNvSpPr txBox="1"/>
+          <p:nvPr/>
+        </p:nvSpPr>
+        <p:spPr>
+          <a:xfrm>
+            <a:off x="301485" y="3650124"/>
+            <a:ext cx="3650975" cy="2677656"/>
+          </a:xfrm>
+          <a:prstGeom prst="rect">
+            <a:avLst/>
+          </a:prstGeom>
+          <a:noFill/>
+        </p:spPr>
+        <p:txBody>
+          <a:bodyPr wrap="square" rtlCol="0">
+            <a:spAutoFit/>
+          </a:bodyPr>
+          <a:lstStyle/>
+          <a:p>
+            <a:r>
+              <a:rPr lang="en-US" sz="1400"/>
+              <a:t>The larger the "Grit" number – the smaller the size of particles. But be careful, becasue there are different Grit scales:</a:t>
+            </a:r>
+          </a:p>
+          <a:p>
+            <a:r>
+              <a:rPr lang="en-US" sz="1400"/>
+              <a:t> FEPA (Europe) and ANSI/Cami (US) </a:t>
+            </a:r>
+          </a:p>
+          <a:p>
+            <a:endParaRPr lang="en-US" sz="1400"/>
+          </a:p>
+          <a:p>
+            <a:r>
+              <a:rPr lang="en-US" sz="1400"/>
+              <a:t>The European </a:t>
+            </a:r>
+          </a:p>
+          <a:p>
+            <a:r>
+              <a:rPr lang="en-US" sz="1400"/>
+              <a:t>  P2000 - 10 microns</a:t>
+            </a:r>
+          </a:p>
+          <a:p>
+            <a:r>
+              <a:rPr lang="en-US" sz="1400"/>
+              <a:t>  P4000 -  5 microns</a:t>
+            </a:r>
+          </a:p>
+          <a:p>
+            <a:r>
+              <a:rPr lang="en-US" sz="1400"/>
+              <a:t>US:</a:t>
+            </a:r>
+          </a:p>
+          <a:p>
+            <a:r>
+              <a:rPr lang="en-US" sz="1400"/>
+              <a:t>    800 - 12.2 microns</a:t>
+            </a:r>
+          </a:p>
+          <a:p>
+            <a:r>
+              <a:rPr lang="en-US" sz="1400"/>
+              <a:t>   1000 -  9.2 microns</a:t>
+            </a:r>
+          </a:p>
+          <a:p>
+            <a:r>
+              <a:rPr lang="en-US" sz="1400"/>
+              <a:t>   1200 -  6.5 microns</a:t>
+            </a:r>
+          </a:p>
+        </p:txBody>
+      </p:sp>
+      <p:sp>
+        <p:nvSpPr>
+          <p:cNvPr id="7" name="TextBox 6">
+            <a:extLst>
+              <a:ext uri="{FF2B5EF4-FFF2-40B4-BE49-F238E27FC236}">
+                <a16:creationId xmlns:a16="http://schemas.microsoft.com/office/drawing/2014/main" id="{C0AF3F8C-B8C7-C277-3B95-67E3DD9F3599}"/>
+              </a:ext>
+            </a:extLst>
+          </p:cNvPr>
+          <p:cNvSpPr txBox="1"/>
+          <p:nvPr/>
+        </p:nvSpPr>
+        <p:spPr>
+          <a:xfrm>
+            <a:off x="8680174" y="350377"/>
+            <a:ext cx="3392557" cy="1815882"/>
+          </a:xfrm>
+          <a:prstGeom prst="rect">
+            <a:avLst/>
+          </a:prstGeom>
+          <a:noFill/>
+        </p:spPr>
+        <p:txBody>
+          <a:bodyPr wrap="square" rtlCol="0">
+            <a:spAutoFit/>
+          </a:bodyPr>
+          <a:lstStyle/>
+          <a:p>
+            <a:r>
+              <a:rPr lang="en-US" sz="1400" i="0">
+                <a:solidFill>
+                  <a:srgbClr val="000000"/>
+                </a:solidFill>
+                <a:effectLst/>
+                <a:latin typeface="inherit"/>
+              </a:rPr>
+              <a:t>Composition: </a:t>
+            </a:r>
+          </a:p>
+          <a:p>
+            <a:pPr marL="285750" indent="-285750">
+              <a:buFont typeface="Arial" panose="020B0604020202020204" pitchFamily="34" charset="0"/>
+              <a:buChar char="•"/>
+            </a:pPr>
+            <a:r>
+              <a:rPr lang="en-US" sz="1400" i="0">
+                <a:solidFill>
+                  <a:srgbClr val="000000"/>
+                </a:solidFill>
+                <a:effectLst/>
+                <a:latin typeface="inherit"/>
+              </a:rPr>
+              <a:t>65-74 parts of trivalent chromium oxide, </a:t>
+            </a:r>
+          </a:p>
+          <a:p>
+            <a:pPr marL="285750" indent="-285750">
+              <a:buFont typeface="Arial" panose="020B0604020202020204" pitchFamily="34" charset="0"/>
+              <a:buChar char="•"/>
+            </a:pPr>
+            <a:r>
+              <a:rPr lang="en-US" sz="1400" i="0">
+                <a:solidFill>
+                  <a:srgbClr val="000000"/>
+                </a:solidFill>
+                <a:effectLst/>
+                <a:latin typeface="inherit"/>
+              </a:rPr>
+              <a:t>1-silica gel, </a:t>
+            </a:r>
+          </a:p>
+          <a:p>
+            <a:pPr marL="285750" indent="-285750">
+              <a:buFont typeface="Arial" panose="020B0604020202020204" pitchFamily="34" charset="0"/>
+              <a:buChar char="•"/>
+            </a:pPr>
+            <a:r>
+              <a:rPr lang="en-US" sz="1400" i="0">
+                <a:solidFill>
+                  <a:srgbClr val="000000"/>
+                </a:solidFill>
+                <a:effectLst/>
+                <a:latin typeface="inherit"/>
+              </a:rPr>
+              <a:t>10-stearin, </a:t>
+            </a:r>
+          </a:p>
+          <a:p>
+            <a:pPr marL="285750" indent="-285750">
+              <a:buFont typeface="Arial" panose="020B0604020202020204" pitchFamily="34" charset="0"/>
+              <a:buChar char="•"/>
+            </a:pPr>
+            <a:r>
+              <a:rPr lang="en-US" sz="1400" i="0">
+                <a:solidFill>
+                  <a:srgbClr val="000000"/>
+                </a:solidFill>
+                <a:effectLst/>
+                <a:latin typeface="inherit"/>
+              </a:rPr>
+              <a:t>10 — split fat, </a:t>
+            </a:r>
+          </a:p>
+          <a:p>
+            <a:pPr marL="285750" indent="-285750">
+              <a:buFont typeface="Arial" panose="020B0604020202020204" pitchFamily="34" charset="0"/>
+              <a:buChar char="•"/>
+            </a:pPr>
+            <a:r>
+              <a:rPr lang="en-US" sz="1400" i="0">
+                <a:solidFill>
+                  <a:srgbClr val="000000"/>
+                </a:solidFill>
+                <a:effectLst/>
+                <a:latin typeface="inherit"/>
+              </a:rPr>
+              <a:t>2-kerosene, </a:t>
+            </a:r>
+          </a:p>
+          <a:p>
+            <a:pPr marL="285750" indent="-285750">
+              <a:buFont typeface="Arial" panose="020B0604020202020204" pitchFamily="34" charset="0"/>
+              <a:buChar char="•"/>
+            </a:pPr>
+            <a:r>
+              <a:rPr lang="en-US" sz="1400" i="0">
+                <a:solidFill>
+                  <a:srgbClr val="000000"/>
+                </a:solidFill>
+                <a:effectLst/>
+                <a:latin typeface="inherit"/>
+              </a:rPr>
+              <a:t>2-oleic acid, </a:t>
+            </a:r>
+          </a:p>
+          <a:p>
+            <a:pPr marL="285750" indent="-285750">
+              <a:buFont typeface="Arial" panose="020B0604020202020204" pitchFamily="34" charset="0"/>
+              <a:buChar char="•"/>
+            </a:pPr>
+            <a:r>
+              <a:rPr lang="en-US" sz="1400" i="0">
+                <a:solidFill>
+                  <a:srgbClr val="000000"/>
+                </a:solidFill>
+                <a:effectLst/>
+                <a:latin typeface="inherit"/>
+              </a:rPr>
+              <a:t>0.2-bicarbonate of soda.</a:t>
+            </a:r>
+          </a:p>
+        </p:txBody>
+      </p:sp>
+      <p:sp>
+        <p:nvSpPr>
+          <p:cNvPr id="8" name="TextBox 7">
+            <a:extLst>
+              <a:ext uri="{FF2B5EF4-FFF2-40B4-BE49-F238E27FC236}">
+                <a16:creationId xmlns:a16="http://schemas.microsoft.com/office/drawing/2014/main" id="{93C94344-85F7-9B8D-D19A-9EDAB7855819}"/>
+              </a:ext>
+            </a:extLst>
+          </p:cNvPr>
+          <p:cNvSpPr txBox="1"/>
+          <p:nvPr/>
+        </p:nvSpPr>
+        <p:spPr>
+          <a:xfrm>
+            <a:off x="6095999" y="2782669"/>
+            <a:ext cx="5473149" cy="954107"/>
+          </a:xfrm>
+          <a:prstGeom prst="rect">
+            <a:avLst/>
+          </a:prstGeom>
+          <a:noFill/>
+        </p:spPr>
+        <p:txBody>
+          <a:bodyPr wrap="square" rtlCol="0">
+            <a:spAutoFit/>
+          </a:bodyPr>
+          <a:lstStyle/>
+          <a:p>
+            <a:r>
+              <a:rPr lang="en-US" sz="1400"/>
+              <a:t>No. 1 – Black paste with a green hue, with a grain size of 0.3-0.1 microns.</a:t>
+            </a:r>
+          </a:p>
+          <a:p>
+            <a:r>
+              <a:rPr lang="en-US" sz="1400"/>
+              <a:t>No. 2 - Dark green paste, with a grain size of 7-1 microns.</a:t>
+            </a:r>
+          </a:p>
+          <a:p>
+            <a:r>
+              <a:rPr lang="en-US" sz="1400"/>
+              <a:t>No. 3 - Green paste, with a grain size of 17-8 microns.</a:t>
+            </a:r>
+          </a:p>
+          <a:p>
+            <a:r>
+              <a:rPr lang="en-US" sz="1400"/>
+              <a:t>No. 4 - Light green paste, with a grain size of 40-18 microns. </a:t>
+            </a:r>
+          </a:p>
+        </p:txBody>
+      </p:sp>
+    </p:spTree>
+    <p:extLst>
+      <p:ext uri="{BB962C8B-B14F-4D97-AF65-F5344CB8AC3E}">
+        <p14:creationId xmlns:p14="http://schemas.microsoft.com/office/powerpoint/2010/main" val="1366641934"/>
       </p:ext>
     </p:extLst>
   </p:cSld>

--- a/sharpen_axe.pptx
+++ b/sharpen_axe.pptx
@@ -266,7 +266,7 @@
           <a:lstStyle/>
           <a:p>
             <a:fld id="{5F491023-0B0A-7041-9F06-D25A50EF063B}" type="datetimeFigureOut">
-              <a:t>10/19/22</a:t>
+              <a:t>10/26/22</a:t>
             </a:fld>
             <a:endParaRPr lang="en-US"/>
           </a:p>
@@ -462,7 +462,7 @@
           <a:lstStyle/>
           <a:p>
             <a:fld id="{5F491023-0B0A-7041-9F06-D25A50EF063B}" type="datetimeFigureOut">
-              <a:t>10/19/22</a:t>
+              <a:t>10/26/22</a:t>
             </a:fld>
             <a:endParaRPr lang="en-US"/>
           </a:p>
@@ -668,7 +668,7 @@
           <a:lstStyle/>
           <a:p>
             <a:fld id="{5F491023-0B0A-7041-9F06-D25A50EF063B}" type="datetimeFigureOut">
-              <a:t>10/19/22</a:t>
+              <a:t>10/26/22</a:t>
             </a:fld>
             <a:endParaRPr lang="en-US"/>
           </a:p>
@@ -864,7 +864,7 @@
           <a:lstStyle/>
           <a:p>
             <a:fld id="{5F491023-0B0A-7041-9F06-D25A50EF063B}" type="datetimeFigureOut">
-              <a:t>10/19/22</a:t>
+              <a:t>10/26/22</a:t>
             </a:fld>
             <a:endParaRPr lang="en-US"/>
           </a:p>
@@ -1137,7 +1137,7 @@
           <a:lstStyle/>
           <a:p>
             <a:fld id="{5F491023-0B0A-7041-9F06-D25A50EF063B}" type="datetimeFigureOut">
-              <a:t>10/19/22</a:t>
+              <a:t>10/26/22</a:t>
             </a:fld>
             <a:endParaRPr lang="en-US"/>
           </a:p>
@@ -1400,7 +1400,7 @@
           <a:lstStyle/>
           <a:p>
             <a:fld id="{5F491023-0B0A-7041-9F06-D25A50EF063B}" type="datetimeFigureOut">
-              <a:t>10/19/22</a:t>
+              <a:t>10/26/22</a:t>
             </a:fld>
             <a:endParaRPr lang="en-US"/>
           </a:p>
@@ -1810,7 +1810,7 @@
           <a:lstStyle/>
           <a:p>
             <a:fld id="{5F491023-0B0A-7041-9F06-D25A50EF063B}" type="datetimeFigureOut">
-              <a:t>10/19/22</a:t>
+              <a:t>10/26/22</a:t>
             </a:fld>
             <a:endParaRPr lang="en-US"/>
           </a:p>
@@ -1949,7 +1949,7 @@
           <a:lstStyle/>
           <a:p>
             <a:fld id="{5F491023-0B0A-7041-9F06-D25A50EF063B}" type="datetimeFigureOut">
-              <a:t>10/19/22</a:t>
+              <a:t>10/26/22</a:t>
             </a:fld>
             <a:endParaRPr lang="en-US"/>
           </a:p>
@@ -2060,7 +2060,7 @@
           <a:lstStyle/>
           <a:p>
             <a:fld id="{5F491023-0B0A-7041-9F06-D25A50EF063B}" type="datetimeFigureOut">
-              <a:t>10/19/22</a:t>
+              <a:t>10/26/22</a:t>
             </a:fld>
             <a:endParaRPr lang="en-US"/>
           </a:p>
@@ -2369,7 +2369,7 @@
           <a:lstStyle/>
           <a:p>
             <a:fld id="{5F491023-0B0A-7041-9F06-D25A50EF063B}" type="datetimeFigureOut">
-              <a:t>10/19/22</a:t>
+              <a:t>10/26/22</a:t>
             </a:fld>
             <a:endParaRPr lang="en-US"/>
           </a:p>
@@ -2655,7 +2655,7 @@
           <a:lstStyle/>
           <a:p>
             <a:fld id="{5F491023-0B0A-7041-9F06-D25A50EF063B}" type="datetimeFigureOut">
-              <a:t>10/19/22</a:t>
+              <a:t>10/26/22</a:t>
             </a:fld>
             <a:endParaRPr lang="en-US"/>
           </a:p>
@@ -2894,7 +2894,7 @@
           </a:lstStyle>
           <a:p>
             <a:fld id="{5F491023-0B0A-7041-9F06-D25A50EF063B}" type="datetimeFigureOut">
-              <a:t>10/19/22</a:t>
+              <a:t>10/26/22</a:t>
             </a:fld>
             <a:endParaRPr lang="en-US"/>
           </a:p>
@@ -6186,6 +6186,53 @@
           <a:chExt cx="0" cy="0"/>
         </a:xfrm>
       </p:grpSpPr>
+      <p:pic>
+        <p:nvPicPr>
+          <p:cNvPr id="9" name="Picture 2" descr="Gransfors Bruks Small Forest Axe">
+            <a:extLst>
+              <a:ext uri="{FF2B5EF4-FFF2-40B4-BE49-F238E27FC236}">
+                <a16:creationId xmlns:a16="http://schemas.microsoft.com/office/drawing/2014/main" id="{FB00E50E-FFBA-284A-53BC-3BC03B3D2D30}"/>
+              </a:ext>
+            </a:extLst>
+          </p:cNvPr>
+          <p:cNvPicPr>
+            <a:picLocks noChangeAspect="1" noChangeArrowheads="1"/>
+          </p:cNvPicPr>
+          <p:nvPr/>
+        </p:nvPicPr>
+        <p:blipFill>
+          <a:blip r:embed="rId2" cstate="email">
+            <a:extLst>
+              <a:ext uri="{28A0092B-C50C-407E-A947-70E740481C1C}">
+                <a14:useLocalDpi xmlns:a14="http://schemas.microsoft.com/office/drawing/2010/main"/>
+              </a:ext>
+            </a:extLst>
+          </a:blip>
+          <a:srcRect/>
+          <a:stretch>
+            <a:fillRect/>
+          </a:stretch>
+        </p:blipFill>
+        <p:spPr bwMode="auto">
+          <a:xfrm>
+            <a:off x="4068231" y="1501320"/>
+            <a:ext cx="3045241" cy="3045241"/>
+          </a:xfrm>
+          <a:prstGeom prst="rect">
+            <a:avLst/>
+          </a:prstGeom>
+          <a:noFill/>
+          <a:extLst>
+            <a:ext uri="{909E8E84-426E-40DD-AFC4-6F175D3DCCD1}">
+              <a14:hiddenFill xmlns:a14="http://schemas.microsoft.com/office/drawing/2010/main">
+                <a:solidFill>
+                  <a:srgbClr val="FFFFFF"/>
+                </a:solidFill>
+              </a14:hiddenFill>
+            </a:ext>
+          </a:extLst>
+        </p:spPr>
+      </p:pic>
       <p:sp>
         <p:nvSpPr>
           <p:cNvPr id="2" name="TextBox 1">
@@ -6315,7 +6362,7 @@
           <p:nvPr/>
         </p:nvPicPr>
         <p:blipFill rotWithShape="1">
-          <a:blip r:embed="rId2" cstate="email">
+          <a:blip r:embed="rId3" cstate="email">
             <a:extLst>
               <a:ext uri="{28A0092B-C50C-407E-A947-70E740481C1C}">
                 <a14:useLocalDpi xmlns:a14="http://schemas.microsoft.com/office/drawing/2010/main"/>
@@ -6405,7 +6452,7 @@
           <p:nvPr/>
         </p:nvPicPr>
         <p:blipFill rotWithShape="1">
-          <a:blip r:embed="rId3" cstate="email">
+          <a:blip r:embed="rId4" cstate="email">
             <a:extLst>
               <a:ext uri="{28A0092B-C50C-407E-A947-70E740481C1C}">
                 <a14:useLocalDpi xmlns:a14="http://schemas.microsoft.com/office/drawing/2010/main"/>
@@ -6417,7 +6464,7 @@
         </p:blipFill>
         <p:spPr bwMode="auto">
           <a:xfrm>
-            <a:off x="1511964" y="2654550"/>
+            <a:off x="1144211" y="4106517"/>
             <a:ext cx="1305470" cy="2109541"/>
           </a:xfrm>
           <a:prstGeom prst="rect">
@@ -6450,7 +6497,7 @@
           <p:nvPr/>
         </p:nvPicPr>
         <p:blipFill>
-          <a:blip r:embed="rId4">
+          <a:blip r:embed="rId5">
             <a:extLst>
               <a:ext uri="{28A0092B-C50C-407E-A947-70E740481C1C}">
                 <a14:useLocalDpi xmlns:a14="http://schemas.microsoft.com/office/drawing/2010/main"/>
@@ -6464,7 +6511,7 @@
         </p:blipFill>
         <p:spPr bwMode="auto">
           <a:xfrm>
-            <a:off x="2914649" y="2467211"/>
+            <a:off x="2386720" y="4000290"/>
             <a:ext cx="2246769" cy="2246769"/>
           </a:xfrm>
           <a:prstGeom prst="rect">
@@ -6497,7 +6544,7 @@
           <p:nvPr/>
         </p:nvPicPr>
         <p:blipFill rotWithShape="1">
-          <a:blip r:embed="rId5" cstate="email">
+          <a:blip r:embed="rId6" cstate="email">
             <a:extLst>
               <a:ext uri="{28A0092B-C50C-407E-A947-70E740481C1C}">
                 <a14:useLocalDpi xmlns:a14="http://schemas.microsoft.com/office/drawing/2010/main"/>
@@ -6509,7 +6556,7 @@
         </p:blipFill>
         <p:spPr bwMode="auto">
           <a:xfrm rot="5400000">
-            <a:off x="-425436" y="3239727"/>
+            <a:off x="-554130" y="4606575"/>
             <a:ext cx="2246769" cy="937594"/>
           </a:xfrm>
           <a:prstGeom prst="rect">
@@ -6541,7 +6588,7 @@
         </p:nvSpPr>
         <p:spPr>
           <a:xfrm>
-            <a:off x="229151" y="5071717"/>
+            <a:off x="100457" y="6438565"/>
             <a:ext cx="4698448" cy="307777"/>
           </a:xfrm>
           <a:prstGeom prst="rect">
@@ -6588,7 +6635,7 @@
           <p:nvPr/>
         </p:nvPicPr>
         <p:blipFill>
-          <a:blip r:embed="rId6" cstate="email">
+          <a:blip r:embed="rId7" cstate="email">
             <a:extLst>
               <a:ext uri="{28A0092B-C50C-407E-A947-70E740481C1C}">
                 <a14:useLocalDpi xmlns:a14="http://schemas.microsoft.com/office/drawing/2010/main"/>
@@ -6650,6 +6697,59 @@
             <a:r>
               <a:rPr lang="en-US" sz="1400"/>
               <a:t>Maul Ax</a:t>
+            </a:r>
+          </a:p>
+        </p:txBody>
+      </p:sp>
+      <p:sp>
+        <p:nvSpPr>
+          <p:cNvPr id="8" name="TextBox 7">
+            <a:extLst>
+              <a:ext uri="{FF2B5EF4-FFF2-40B4-BE49-F238E27FC236}">
+                <a16:creationId xmlns:a16="http://schemas.microsoft.com/office/drawing/2014/main" id="{23603549-B578-CE7C-8FED-F9A338540C8B}"/>
+              </a:ext>
+            </a:extLst>
+          </p:cNvPr>
+          <p:cNvSpPr txBox="1"/>
+          <p:nvPr/>
+        </p:nvSpPr>
+        <p:spPr>
+          <a:xfrm>
+            <a:off x="4175993" y="3526282"/>
+            <a:ext cx="1876174" cy="738664"/>
+          </a:xfrm>
+          <a:prstGeom prst="rect">
+            <a:avLst/>
+          </a:prstGeom>
+          <a:solidFill>
+            <a:schemeClr val="accent4">
+              <a:lumMod val="20000"/>
+              <a:lumOff val="80000"/>
+            </a:schemeClr>
+          </a:solidFill>
+          <a:ln>
+            <a:solidFill>
+              <a:srgbClr val="FF0000"/>
+            </a:solidFill>
+          </a:ln>
+        </p:spPr>
+        <p:txBody>
+          <a:bodyPr wrap="square" rtlCol="0">
+            <a:spAutoFit/>
+          </a:bodyPr>
+          <a:lstStyle/>
+          <a:p>
+            <a:pPr algn="ctr"/>
+            <a:r>
+              <a:rPr lang="en-US" sz="1400"/>
+              <a:t>Gransfors Bruk Small Forest Axe 19.5"</a:t>
+            </a:r>
+          </a:p>
+          <a:p>
+            <a:pPr algn="ctr"/>
+            <a:r>
+              <a:rPr lang="en-US" sz="1400"/>
+              <a:t>$175</a:t>
             </a:r>
           </a:p>
         </p:txBody>

--- a/sharpen_axe.pptx
+++ b/sharpen_axe.pptx
@@ -10,10 +10,11 @@
     <p:sldId id="262" r:id="rId4"/>
     <p:sldId id="265" r:id="rId5"/>
     <p:sldId id="264" r:id="rId6"/>
-    <p:sldId id="266" r:id="rId7"/>
-    <p:sldId id="263" r:id="rId8"/>
-    <p:sldId id="267" r:id="rId9"/>
-    <p:sldId id="269" r:id="rId10"/>
+    <p:sldId id="270" r:id="rId7"/>
+    <p:sldId id="266" r:id="rId8"/>
+    <p:sldId id="263" r:id="rId9"/>
+    <p:sldId id="267" r:id="rId10"/>
+    <p:sldId id="269" r:id="rId11"/>
   </p:sldIdLst>
   <p:sldSz cx="12192000" cy="6858000"/>
   <p:notesSz cx="6858000" cy="9144000"/>
@@ -266,7 +267,7 @@
           <a:lstStyle/>
           <a:p>
             <a:fld id="{5F491023-0B0A-7041-9F06-D25A50EF063B}" type="datetimeFigureOut">
-              <a:t>10/26/22</a:t>
+              <a:t>11/3/22</a:t>
             </a:fld>
             <a:endParaRPr lang="en-US"/>
           </a:p>
@@ -462,7 +463,7 @@
           <a:lstStyle/>
           <a:p>
             <a:fld id="{5F491023-0B0A-7041-9F06-D25A50EF063B}" type="datetimeFigureOut">
-              <a:t>10/26/22</a:t>
+              <a:t>11/3/22</a:t>
             </a:fld>
             <a:endParaRPr lang="en-US"/>
           </a:p>
@@ -668,7 +669,7 @@
           <a:lstStyle/>
           <a:p>
             <a:fld id="{5F491023-0B0A-7041-9F06-D25A50EF063B}" type="datetimeFigureOut">
-              <a:t>10/26/22</a:t>
+              <a:t>11/3/22</a:t>
             </a:fld>
             <a:endParaRPr lang="en-US"/>
           </a:p>
@@ -864,7 +865,7 @@
           <a:lstStyle/>
           <a:p>
             <a:fld id="{5F491023-0B0A-7041-9F06-D25A50EF063B}" type="datetimeFigureOut">
-              <a:t>10/26/22</a:t>
+              <a:t>11/3/22</a:t>
             </a:fld>
             <a:endParaRPr lang="en-US"/>
           </a:p>
@@ -1137,7 +1138,7 @@
           <a:lstStyle/>
           <a:p>
             <a:fld id="{5F491023-0B0A-7041-9F06-D25A50EF063B}" type="datetimeFigureOut">
-              <a:t>10/26/22</a:t>
+              <a:t>11/3/22</a:t>
             </a:fld>
             <a:endParaRPr lang="en-US"/>
           </a:p>
@@ -1400,7 +1401,7 @@
           <a:lstStyle/>
           <a:p>
             <a:fld id="{5F491023-0B0A-7041-9F06-D25A50EF063B}" type="datetimeFigureOut">
-              <a:t>10/26/22</a:t>
+              <a:t>11/3/22</a:t>
             </a:fld>
             <a:endParaRPr lang="en-US"/>
           </a:p>
@@ -1810,7 +1811,7 @@
           <a:lstStyle/>
           <a:p>
             <a:fld id="{5F491023-0B0A-7041-9F06-D25A50EF063B}" type="datetimeFigureOut">
-              <a:t>10/26/22</a:t>
+              <a:t>11/3/22</a:t>
             </a:fld>
             <a:endParaRPr lang="en-US"/>
           </a:p>
@@ -1949,7 +1950,7 @@
           <a:lstStyle/>
           <a:p>
             <a:fld id="{5F491023-0B0A-7041-9F06-D25A50EF063B}" type="datetimeFigureOut">
-              <a:t>10/26/22</a:t>
+              <a:t>11/3/22</a:t>
             </a:fld>
             <a:endParaRPr lang="en-US"/>
           </a:p>
@@ -2060,7 +2061,7 @@
           <a:lstStyle/>
           <a:p>
             <a:fld id="{5F491023-0B0A-7041-9F06-D25A50EF063B}" type="datetimeFigureOut">
-              <a:t>10/26/22</a:t>
+              <a:t>11/3/22</a:t>
             </a:fld>
             <a:endParaRPr lang="en-US"/>
           </a:p>
@@ -2369,7 +2370,7 @@
           <a:lstStyle/>
           <a:p>
             <a:fld id="{5F491023-0B0A-7041-9F06-D25A50EF063B}" type="datetimeFigureOut">
-              <a:t>10/26/22</a:t>
+              <a:t>11/3/22</a:t>
             </a:fld>
             <a:endParaRPr lang="en-US"/>
           </a:p>
@@ -2655,7 +2656,7 @@
           <a:lstStyle/>
           <a:p>
             <a:fld id="{5F491023-0B0A-7041-9F06-D25A50EF063B}" type="datetimeFigureOut">
-              <a:t>10/26/22</a:t>
+              <a:t>11/3/22</a:t>
             </a:fld>
             <a:endParaRPr lang="en-US"/>
           </a:p>
@@ -2894,7 +2895,7 @@
           </a:lstStyle>
           <a:p>
             <a:fld id="{5F491023-0B0A-7041-9F06-D25A50EF063B}" type="datetimeFigureOut">
-              <a:t>10/26/22</a:t>
+              <a:t>11/3/22</a:t>
             </a:fld>
             <a:endParaRPr lang="en-US"/>
           </a:p>
@@ -3998,6 +3999,536 @@
 </p:sld>
 </file>
 
+<file path=ppt/slides/slide10.xml><?xml version="1.0" encoding="utf-8"?>
+<p:sld xmlns:a="http://schemas.openxmlformats.org/drawingml/2006/main" xmlns:r="http://schemas.openxmlformats.org/officeDocument/2006/relationships" xmlns:p="http://schemas.openxmlformats.org/presentationml/2006/main">
+  <p:cSld>
+    <p:spTree>
+      <p:nvGrpSpPr>
+        <p:cNvPr id="1" name=""/>
+        <p:cNvGrpSpPr/>
+        <p:nvPr/>
+      </p:nvGrpSpPr>
+      <p:grpSpPr>
+        <a:xfrm>
+          <a:off x="0" y="0"/>
+          <a:ext cx="0" cy="0"/>
+          <a:chOff x="0" y="0"/>
+          <a:chExt cx="0" cy="0"/>
+        </a:xfrm>
+      </p:grpSpPr>
+      <p:sp>
+        <p:nvSpPr>
+          <p:cNvPr id="2" name="TextBox 1">
+            <a:extLst>
+              <a:ext uri="{FF2B5EF4-FFF2-40B4-BE49-F238E27FC236}">
+                <a16:creationId xmlns:a16="http://schemas.microsoft.com/office/drawing/2014/main" id="{520D4253-2ED8-0EB9-1C23-7F80EC3B9CD6}"/>
+              </a:ext>
+            </a:extLst>
+          </p:cNvPr>
+          <p:cNvSpPr txBox="1"/>
+          <p:nvPr/>
+        </p:nvSpPr>
+        <p:spPr>
+          <a:xfrm>
+            <a:off x="119269" y="705678"/>
+            <a:ext cx="4823792" cy="1384995"/>
+          </a:xfrm>
+          <a:prstGeom prst="rect">
+            <a:avLst/>
+          </a:prstGeom>
+          <a:solidFill>
+            <a:schemeClr val="accent4">
+              <a:lumMod val="20000"/>
+              <a:lumOff val="80000"/>
+            </a:schemeClr>
+          </a:solidFill>
+          <a:ln>
+            <a:solidFill>
+              <a:srgbClr val="FF0000"/>
+            </a:solidFill>
+          </a:ln>
+        </p:spPr>
+        <p:txBody>
+          <a:bodyPr wrap="square" rtlCol="0">
+            <a:spAutoFit/>
+          </a:bodyPr>
+          <a:lstStyle/>
+          <a:p>
+            <a:r>
+              <a:rPr lang="ru-RU" sz="1400"/>
+              <a:t>Па́ста ГОИ (от ГОИ — Государственный оптический институт) — шлифовальные и полировальные пасты на основе оксида хрома</a:t>
+            </a:r>
+            <a:r>
+              <a:rPr lang="en-US" sz="1400"/>
+              <a:t>, </a:t>
+            </a:r>
+            <a:r>
+              <a:rPr lang="ru-RU" sz="1400"/>
+              <a:t>используемые для шлифования и полирования стальных сплавов, цветных металлов, твёрдых пластмасс и полимеров, стёкол, оптических стёкол, керамических материалов.</a:t>
+            </a:r>
+            <a:endParaRPr lang="en-US" sz="1400"/>
+          </a:p>
+        </p:txBody>
+      </p:sp>
+      <p:sp>
+        <p:nvSpPr>
+          <p:cNvPr id="3" name="TextBox 2">
+            <a:extLst>
+              <a:ext uri="{FF2B5EF4-FFF2-40B4-BE49-F238E27FC236}">
+                <a16:creationId xmlns:a16="http://schemas.microsoft.com/office/drawing/2014/main" id="{027EFAC2-91F2-94C5-4A95-1C3A54E229A8}"/>
+              </a:ext>
+            </a:extLst>
+          </p:cNvPr>
+          <p:cNvSpPr txBox="1"/>
+          <p:nvPr/>
+        </p:nvSpPr>
+        <p:spPr>
+          <a:xfrm>
+            <a:off x="49695" y="69574"/>
+            <a:ext cx="1888435" cy="523220"/>
+          </a:xfrm>
+          <a:prstGeom prst="rect">
+            <a:avLst/>
+          </a:prstGeom>
+          <a:noFill/>
+        </p:spPr>
+        <p:txBody>
+          <a:bodyPr wrap="square" rtlCol="0">
+            <a:spAutoFit/>
+          </a:bodyPr>
+          <a:lstStyle/>
+          <a:p>
+            <a:r>
+              <a:rPr lang="ru-RU" sz="2800" b="1"/>
+              <a:t>Па́ста ГОИ</a:t>
+            </a:r>
+            <a:endParaRPr lang="en-US" sz="2800" b="1"/>
+          </a:p>
+        </p:txBody>
+      </p:sp>
+      <p:pic>
+        <p:nvPicPr>
+          <p:cNvPr id="1026" name="Picture 2">
+            <a:extLst>
+              <a:ext uri="{FF2B5EF4-FFF2-40B4-BE49-F238E27FC236}">
+                <a16:creationId xmlns:a16="http://schemas.microsoft.com/office/drawing/2014/main" id="{52A9AA8E-0192-5387-6900-2162B5872002}"/>
+              </a:ext>
+            </a:extLst>
+          </p:cNvPr>
+          <p:cNvPicPr>
+            <a:picLocks noChangeAspect="1" noChangeArrowheads="1"/>
+          </p:cNvPicPr>
+          <p:nvPr/>
+        </p:nvPicPr>
+        <p:blipFill>
+          <a:blip r:embed="rId2" cstate="email">
+            <a:extLst>
+              <a:ext uri="{28A0092B-C50C-407E-A947-70E740481C1C}">
+                <a14:useLocalDpi xmlns:a14="http://schemas.microsoft.com/office/drawing/2010/main"/>
+              </a:ext>
+            </a:extLst>
+          </a:blip>
+          <a:srcRect/>
+          <a:stretch>
+            <a:fillRect/>
+          </a:stretch>
+        </p:blipFill>
+        <p:spPr bwMode="auto">
+          <a:xfrm>
+            <a:off x="6096000" y="350377"/>
+            <a:ext cx="2421176" cy="1815882"/>
+          </a:xfrm>
+          <a:prstGeom prst="rect">
+            <a:avLst/>
+          </a:prstGeom>
+          <a:noFill/>
+          <a:extLst>
+            <a:ext uri="{909E8E84-426E-40DD-AFC4-6F175D3DCCD1}">
+              <a14:hiddenFill xmlns:a14="http://schemas.microsoft.com/office/drawing/2010/main">
+                <a:solidFill>
+                  <a:srgbClr val="FFFFFF"/>
+                </a:solidFill>
+              </a14:hiddenFill>
+            </a:ext>
+          </a:extLst>
+        </p:spPr>
+      </p:pic>
+      <p:sp>
+        <p:nvSpPr>
+          <p:cNvPr id="4" name="TextBox 3">
+            <a:extLst>
+              <a:ext uri="{FF2B5EF4-FFF2-40B4-BE49-F238E27FC236}">
+                <a16:creationId xmlns:a16="http://schemas.microsoft.com/office/drawing/2014/main" id="{25E1BB97-1967-4A2B-90E4-0EA23F9B338C}"/>
+              </a:ext>
+            </a:extLst>
+          </p:cNvPr>
+          <p:cNvSpPr txBox="1"/>
+          <p:nvPr/>
+        </p:nvSpPr>
+        <p:spPr>
+          <a:xfrm>
+            <a:off x="6378935" y="2166259"/>
+            <a:ext cx="1855305" cy="369332"/>
+          </a:xfrm>
+          <a:prstGeom prst="rect">
+            <a:avLst/>
+          </a:prstGeom>
+          <a:noFill/>
+        </p:spPr>
+        <p:txBody>
+          <a:bodyPr wrap="square" rtlCol="0">
+            <a:spAutoFit/>
+          </a:bodyPr>
+          <a:lstStyle/>
+          <a:p>
+            <a:r>
+              <a:rPr lang="ru-RU"/>
+              <a:t>Кусок пасты ГОИ</a:t>
+            </a:r>
+            <a:endParaRPr lang="en-US"/>
+          </a:p>
+        </p:txBody>
+      </p:sp>
+      <p:sp>
+        <p:nvSpPr>
+          <p:cNvPr id="5" name="TextBox 4">
+            <a:extLst>
+              <a:ext uri="{FF2B5EF4-FFF2-40B4-BE49-F238E27FC236}">
+                <a16:creationId xmlns:a16="http://schemas.microsoft.com/office/drawing/2014/main" id="{578348FC-CB01-20A8-208D-968A291B1030}"/>
+              </a:ext>
+            </a:extLst>
+          </p:cNvPr>
+          <p:cNvSpPr txBox="1"/>
+          <p:nvPr/>
+        </p:nvSpPr>
+        <p:spPr>
+          <a:xfrm>
+            <a:off x="119269" y="2782669"/>
+            <a:ext cx="4558748" cy="646331"/>
+          </a:xfrm>
+          <a:prstGeom prst="rect">
+            <a:avLst/>
+          </a:prstGeom>
+          <a:noFill/>
+        </p:spPr>
+        <p:txBody>
+          <a:bodyPr wrap="square" rtlCol="0">
+            <a:spAutoFit/>
+          </a:bodyPr>
+          <a:lstStyle/>
+          <a:p>
+            <a:r>
+              <a:rPr lang="en-US"/>
+              <a:t>There are multiple honing and polishing pastes and compounds on amazon</a:t>
+            </a:r>
+          </a:p>
+        </p:txBody>
+      </p:sp>
+      <p:sp>
+        <p:nvSpPr>
+          <p:cNvPr id="6" name="TextBox 5">
+            <a:extLst>
+              <a:ext uri="{FF2B5EF4-FFF2-40B4-BE49-F238E27FC236}">
+                <a16:creationId xmlns:a16="http://schemas.microsoft.com/office/drawing/2014/main" id="{43739B9B-E3BC-F4A8-10A9-860BFA040DA2}"/>
+              </a:ext>
+            </a:extLst>
+          </p:cNvPr>
+          <p:cNvSpPr txBox="1"/>
+          <p:nvPr/>
+        </p:nvSpPr>
+        <p:spPr>
+          <a:xfrm>
+            <a:off x="301485" y="3650124"/>
+            <a:ext cx="3650975" cy="2677656"/>
+          </a:xfrm>
+          <a:prstGeom prst="rect">
+            <a:avLst/>
+          </a:prstGeom>
+          <a:noFill/>
+        </p:spPr>
+        <p:txBody>
+          <a:bodyPr wrap="square" rtlCol="0">
+            <a:spAutoFit/>
+          </a:bodyPr>
+          <a:lstStyle/>
+          <a:p>
+            <a:r>
+              <a:rPr lang="en-US" sz="1400"/>
+              <a:t>The larger the "Grit" number – the smaller the size of particles. But be careful, becasue there are different Grit scales:</a:t>
+            </a:r>
+          </a:p>
+          <a:p>
+            <a:r>
+              <a:rPr lang="en-US" sz="1400"/>
+              <a:t> FEPA (Europe) and ANSI/Cami (US) </a:t>
+            </a:r>
+          </a:p>
+          <a:p>
+            <a:endParaRPr lang="en-US" sz="1400"/>
+          </a:p>
+          <a:p>
+            <a:r>
+              <a:rPr lang="en-US" sz="1400"/>
+              <a:t>The European </a:t>
+            </a:r>
+          </a:p>
+          <a:p>
+            <a:r>
+              <a:rPr lang="en-US" sz="1400"/>
+              <a:t>  P2000 - 10 microns</a:t>
+            </a:r>
+          </a:p>
+          <a:p>
+            <a:r>
+              <a:rPr lang="en-US" sz="1400"/>
+              <a:t>  P4000 -  5 microns</a:t>
+            </a:r>
+          </a:p>
+          <a:p>
+            <a:r>
+              <a:rPr lang="en-US" sz="1400"/>
+              <a:t>US:</a:t>
+            </a:r>
+          </a:p>
+          <a:p>
+            <a:r>
+              <a:rPr lang="en-US" sz="1400"/>
+              <a:t>    800 - 12.2 microns</a:t>
+            </a:r>
+          </a:p>
+          <a:p>
+            <a:r>
+              <a:rPr lang="en-US" sz="1400"/>
+              <a:t>   1000 -  9.2 microns</a:t>
+            </a:r>
+          </a:p>
+          <a:p>
+            <a:r>
+              <a:rPr lang="en-US" sz="1400"/>
+              <a:t>   1200 -  6.5 microns</a:t>
+            </a:r>
+          </a:p>
+        </p:txBody>
+      </p:sp>
+      <p:sp>
+        <p:nvSpPr>
+          <p:cNvPr id="7" name="TextBox 6">
+            <a:extLst>
+              <a:ext uri="{FF2B5EF4-FFF2-40B4-BE49-F238E27FC236}">
+                <a16:creationId xmlns:a16="http://schemas.microsoft.com/office/drawing/2014/main" id="{C0AF3F8C-B8C7-C277-3B95-67E3DD9F3599}"/>
+              </a:ext>
+            </a:extLst>
+          </p:cNvPr>
+          <p:cNvSpPr txBox="1"/>
+          <p:nvPr/>
+        </p:nvSpPr>
+        <p:spPr>
+          <a:xfrm>
+            <a:off x="8680174" y="350377"/>
+            <a:ext cx="3392557" cy="1815882"/>
+          </a:xfrm>
+          <a:prstGeom prst="rect">
+            <a:avLst/>
+          </a:prstGeom>
+          <a:noFill/>
+        </p:spPr>
+        <p:txBody>
+          <a:bodyPr wrap="square" rtlCol="0">
+            <a:spAutoFit/>
+          </a:bodyPr>
+          <a:lstStyle/>
+          <a:p>
+            <a:r>
+              <a:rPr lang="en-US" sz="1400" i="0">
+                <a:solidFill>
+                  <a:srgbClr val="000000"/>
+                </a:solidFill>
+                <a:effectLst/>
+                <a:latin typeface="inherit"/>
+              </a:rPr>
+              <a:t>Composition: </a:t>
+            </a:r>
+          </a:p>
+          <a:p>
+            <a:pPr marL="285750" indent="-285750">
+              <a:buFont typeface="Arial" panose="020B0604020202020204" pitchFamily="34" charset="0"/>
+              <a:buChar char="•"/>
+            </a:pPr>
+            <a:r>
+              <a:rPr lang="en-US" sz="1400" i="0">
+                <a:solidFill>
+                  <a:srgbClr val="000000"/>
+                </a:solidFill>
+                <a:effectLst/>
+                <a:latin typeface="inherit"/>
+              </a:rPr>
+              <a:t>65-74 parts of trivalent chromium oxide, </a:t>
+            </a:r>
+          </a:p>
+          <a:p>
+            <a:pPr marL="285750" indent="-285750">
+              <a:buFont typeface="Arial" panose="020B0604020202020204" pitchFamily="34" charset="0"/>
+              <a:buChar char="•"/>
+            </a:pPr>
+            <a:r>
+              <a:rPr lang="en-US" sz="1400" i="0">
+                <a:solidFill>
+                  <a:srgbClr val="000000"/>
+                </a:solidFill>
+                <a:effectLst/>
+                <a:latin typeface="inherit"/>
+              </a:rPr>
+              <a:t>1-silica gel, </a:t>
+            </a:r>
+          </a:p>
+          <a:p>
+            <a:pPr marL="285750" indent="-285750">
+              <a:buFont typeface="Arial" panose="020B0604020202020204" pitchFamily="34" charset="0"/>
+              <a:buChar char="•"/>
+            </a:pPr>
+            <a:r>
+              <a:rPr lang="en-US" sz="1400" i="0">
+                <a:solidFill>
+                  <a:srgbClr val="000000"/>
+                </a:solidFill>
+                <a:effectLst/>
+                <a:latin typeface="inherit"/>
+              </a:rPr>
+              <a:t>10-stearin, </a:t>
+            </a:r>
+          </a:p>
+          <a:p>
+            <a:pPr marL="285750" indent="-285750">
+              <a:buFont typeface="Arial" panose="020B0604020202020204" pitchFamily="34" charset="0"/>
+              <a:buChar char="•"/>
+            </a:pPr>
+            <a:r>
+              <a:rPr lang="en-US" sz="1400" i="0">
+                <a:solidFill>
+                  <a:srgbClr val="000000"/>
+                </a:solidFill>
+                <a:effectLst/>
+                <a:latin typeface="inherit"/>
+              </a:rPr>
+              <a:t>10 — split fat, </a:t>
+            </a:r>
+          </a:p>
+          <a:p>
+            <a:pPr marL="285750" indent="-285750">
+              <a:buFont typeface="Arial" panose="020B0604020202020204" pitchFamily="34" charset="0"/>
+              <a:buChar char="•"/>
+            </a:pPr>
+            <a:r>
+              <a:rPr lang="en-US" sz="1400" i="0">
+                <a:solidFill>
+                  <a:srgbClr val="000000"/>
+                </a:solidFill>
+                <a:effectLst/>
+                <a:latin typeface="inherit"/>
+              </a:rPr>
+              <a:t>2-kerosene, </a:t>
+            </a:r>
+          </a:p>
+          <a:p>
+            <a:pPr marL="285750" indent="-285750">
+              <a:buFont typeface="Arial" panose="020B0604020202020204" pitchFamily="34" charset="0"/>
+              <a:buChar char="•"/>
+            </a:pPr>
+            <a:r>
+              <a:rPr lang="en-US" sz="1400" i="0">
+                <a:solidFill>
+                  <a:srgbClr val="000000"/>
+                </a:solidFill>
+                <a:effectLst/>
+                <a:latin typeface="inherit"/>
+              </a:rPr>
+              <a:t>2-oleic acid, </a:t>
+            </a:r>
+          </a:p>
+          <a:p>
+            <a:pPr marL="285750" indent="-285750">
+              <a:buFont typeface="Arial" panose="020B0604020202020204" pitchFamily="34" charset="0"/>
+              <a:buChar char="•"/>
+            </a:pPr>
+            <a:r>
+              <a:rPr lang="en-US" sz="1400" i="0">
+                <a:solidFill>
+                  <a:srgbClr val="000000"/>
+                </a:solidFill>
+                <a:effectLst/>
+                <a:latin typeface="inherit"/>
+              </a:rPr>
+              <a:t>0.2-bicarbonate of soda.</a:t>
+            </a:r>
+          </a:p>
+        </p:txBody>
+      </p:sp>
+      <p:sp>
+        <p:nvSpPr>
+          <p:cNvPr id="8" name="TextBox 7">
+            <a:extLst>
+              <a:ext uri="{FF2B5EF4-FFF2-40B4-BE49-F238E27FC236}">
+                <a16:creationId xmlns:a16="http://schemas.microsoft.com/office/drawing/2014/main" id="{93C94344-85F7-9B8D-D19A-9EDAB7855819}"/>
+              </a:ext>
+            </a:extLst>
+          </p:cNvPr>
+          <p:cNvSpPr txBox="1"/>
+          <p:nvPr/>
+        </p:nvSpPr>
+        <p:spPr>
+          <a:xfrm>
+            <a:off x="6095999" y="2782669"/>
+            <a:ext cx="5473149" cy="954107"/>
+          </a:xfrm>
+          <a:prstGeom prst="rect">
+            <a:avLst/>
+          </a:prstGeom>
+          <a:noFill/>
+        </p:spPr>
+        <p:txBody>
+          <a:bodyPr wrap="square" rtlCol="0">
+            <a:spAutoFit/>
+          </a:bodyPr>
+          <a:lstStyle/>
+          <a:p>
+            <a:r>
+              <a:rPr lang="en-US" sz="1400"/>
+              <a:t>No. 1 – Black paste with a green hue, with a grain size of 0.3-0.1 microns.</a:t>
+            </a:r>
+          </a:p>
+          <a:p>
+            <a:r>
+              <a:rPr lang="en-US" sz="1400"/>
+              <a:t>No. 2 - Dark green paste, with a grain size of 7-1 microns.</a:t>
+            </a:r>
+          </a:p>
+          <a:p>
+            <a:r>
+              <a:rPr lang="en-US" sz="1400"/>
+              <a:t>No. 3 - Green paste, with a grain size of 17-8 microns.</a:t>
+            </a:r>
+          </a:p>
+          <a:p>
+            <a:r>
+              <a:rPr lang="en-US" sz="1400"/>
+              <a:t>No. 4 - Light green paste, with a grain size of 40-18 microns. </a:t>
+            </a:r>
+          </a:p>
+        </p:txBody>
+      </p:sp>
+    </p:spTree>
+    <p:extLst>
+      <p:ext uri="{BB962C8B-B14F-4D97-AF65-F5344CB8AC3E}">
+        <p14:creationId xmlns:p14="http://schemas.microsoft.com/office/powerpoint/2010/main" val="1366641934"/>
+      </p:ext>
+    </p:extLst>
+  </p:cSld>
+  <p:clrMapOvr>
+    <a:masterClrMapping/>
+  </p:clrMapOvr>
+</p:sld>
+</file>
+
 <file path=ppt/slides/slide2.xml><?xml version="1.0" encoding="utf-8"?>
 <p:sld xmlns:a="http://schemas.openxmlformats.org/drawingml/2006/main" xmlns:r="http://schemas.openxmlformats.org/officeDocument/2006/relationships" xmlns:p="http://schemas.openxmlformats.org/presentationml/2006/main">
   <p:cSld>
@@ -5386,59 +5917,47 @@
           <a:chExt cx="0" cy="0"/>
         </a:xfrm>
       </p:grpSpPr>
-      <p:pic>
-        <p:nvPicPr>
-          <p:cNvPr id="2050" name="Picture 2" descr="DIY MDF Sharpening Wheel (XL 10&quot;) - YouTube">
-            <a:extLst>
-              <a:ext uri="{FF2B5EF4-FFF2-40B4-BE49-F238E27FC236}">
-                <a16:creationId xmlns:a16="http://schemas.microsoft.com/office/drawing/2014/main" id="{4DE831BD-63D0-6612-0BBB-373CD741BCC2}"/>
-              </a:ext>
-            </a:extLst>
-          </p:cNvPr>
-          <p:cNvPicPr>
-            <a:picLocks noChangeAspect="1" noChangeArrowheads="1"/>
-          </p:cNvPicPr>
+      <p:sp>
+        <p:nvSpPr>
+          <p:cNvPr id="2" name="TextBox 1">
+            <a:extLst>
+              <a:ext uri="{FF2B5EF4-FFF2-40B4-BE49-F238E27FC236}">
+                <a16:creationId xmlns:a16="http://schemas.microsoft.com/office/drawing/2014/main" id="{B68A779B-B45D-2156-662D-27E3A7786D09}"/>
+              </a:ext>
+            </a:extLst>
+          </p:cNvPr>
+          <p:cNvSpPr txBox="1"/>
           <p:nvPr/>
-        </p:nvPicPr>
-        <p:blipFill>
-          <a:blip r:embed="rId2" cstate="email">
-            <a:extLst>
-              <a:ext uri="{28A0092B-C50C-407E-A947-70E740481C1C}">
-                <a14:useLocalDpi xmlns:a14="http://schemas.microsoft.com/office/drawing/2010/main"/>
-              </a:ext>
-            </a:extLst>
-          </a:blip>
-          <a:srcRect/>
-          <a:stretch>
-            <a:fillRect/>
-          </a:stretch>
-        </p:blipFill>
-        <p:spPr bwMode="auto">
-          <a:xfrm>
-            <a:off x="7202773" y="453282"/>
-            <a:ext cx="4621967" cy="2599856"/>
+        </p:nvSpPr>
+        <p:spPr>
+          <a:xfrm>
+            <a:off x="195209" y="154112"/>
+            <a:ext cx="2928135" cy="369332"/>
           </a:xfrm>
           <a:prstGeom prst="rect">
             <a:avLst/>
           </a:prstGeom>
           <a:noFill/>
-          <a:extLst>
-            <a:ext uri="{909E8E84-426E-40DD-AFC4-6F175D3DCCD1}">
-              <a14:hiddenFill xmlns:a14="http://schemas.microsoft.com/office/drawing/2010/main">
-                <a:solidFill>
-                  <a:srgbClr val="FFFFFF"/>
-                </a:solidFill>
-              </a14:hiddenFill>
-            </a:ext>
-          </a:extLst>
-        </p:spPr>
-      </p:pic>
-      <p:sp>
-        <p:nvSpPr>
-          <p:cNvPr id="2" name="TextBox 1">
-            <a:extLst>
-              <a:ext uri="{FF2B5EF4-FFF2-40B4-BE49-F238E27FC236}">
-                <a16:creationId xmlns:a16="http://schemas.microsoft.com/office/drawing/2014/main" id="{53A27154-6F35-6637-45BF-A451AD32422C}"/>
+        </p:spPr>
+        <p:txBody>
+          <a:bodyPr wrap="square" rtlCol="0">
+            <a:spAutoFit/>
+          </a:bodyPr>
+          <a:lstStyle/>
+          <a:p>
+            <a:r>
+              <a:rPr lang="en-US"/>
+              <a:t>Tormek Sharpening Machine</a:t>
+            </a:r>
+          </a:p>
+        </p:txBody>
+      </p:sp>
+      <p:sp>
+        <p:nvSpPr>
+          <p:cNvPr id="3" name="TextBox 2">
+            <a:extLst>
+              <a:ext uri="{FF2B5EF4-FFF2-40B4-BE49-F238E27FC236}">
+                <a16:creationId xmlns:a16="http://schemas.microsoft.com/office/drawing/2014/main" id="{C1B6A97A-873E-8D4F-DF54-16F0EBA26137}"/>
               </a:ext>
             </a:extLst>
           </p:cNvPr>
@@ -5447,8 +5966,8 @@
         </p:nvSpPr>
         <p:spPr>
           <a:xfrm>
-            <a:off x="7759906" y="3152647"/>
-            <a:ext cx="3507699" cy="276999"/>
+            <a:off x="195209" y="584551"/>
+            <a:ext cx="1869896" cy="307777"/>
           </a:xfrm>
           <a:prstGeom prst="rect">
             <a:avLst/>
@@ -5462,350 +5981,21 @@
           <a:lstStyle/>
           <a:p>
             <a:r>
-              <a:rPr lang="en-US" sz="1200"/>
-              <a:t>https://www.youtube.com/watch?v=f2vvihhr238</a:t>
-            </a:r>
-          </a:p>
-        </p:txBody>
-      </p:sp>
-      <p:sp>
-        <p:nvSpPr>
-          <p:cNvPr id="3" name="TextBox 2">
-            <a:extLst>
-              <a:ext uri="{FF2B5EF4-FFF2-40B4-BE49-F238E27FC236}">
-                <a16:creationId xmlns:a16="http://schemas.microsoft.com/office/drawing/2014/main" id="{5BCB6A15-1BBB-8ED7-417E-38EFF2488CA7}"/>
-              </a:ext>
-            </a:extLst>
-          </p:cNvPr>
-          <p:cNvSpPr txBox="1"/>
-          <p:nvPr/>
-        </p:nvSpPr>
-        <p:spPr>
-          <a:xfrm>
-            <a:off x="5993566" y="3531900"/>
-            <a:ext cx="5831174" cy="954107"/>
-          </a:xfrm>
-          <a:prstGeom prst="rect">
-            <a:avLst/>
-          </a:prstGeom>
-          <a:noFill/>
-        </p:spPr>
-        <p:txBody>
-          <a:bodyPr wrap="square" rtlCol="0">
-            <a:spAutoFit/>
-          </a:bodyPr>
-          <a:lstStyle/>
-          <a:p>
-            <a:r>
-              <a:rPr lang="en-US" sz="1400" b="0" i="0">
-                <a:solidFill>
-                  <a:srgbClr val="030303"/>
-                </a:solidFill>
-                <a:effectLst/>
+              <a:rPr lang="en-US" sz="1400">
+                <a:hlinkClick r:id="rId2"/>
               </a:rPr>
-              <a:t>I used scrap MDF and bought the the other supplies, links below. </a:t>
-            </a:r>
-          </a:p>
-          <a:p>
-            <a:pPr marL="285750" indent="-285750">
-              <a:buFont typeface="Arial" panose="020B0604020202020204" pitchFamily="34" charset="0"/>
-              <a:buChar char="•"/>
-            </a:pPr>
-            <a:r>
-              <a:rPr lang="en-US" sz="1400" b="0" i="0">
-                <a:solidFill>
-                  <a:srgbClr val="030303"/>
-                </a:solidFill>
-                <a:effectLst/>
-              </a:rPr>
-              <a:t>Beeswax </a:t>
-            </a:r>
-            <a:r>
-              <a:rPr lang="en-US" sz="1400" b="0" i="0">
-                <a:effectLst/>
-                <a:hlinkClick r:id="rId3"/>
-              </a:rPr>
-              <a:t>https://amzn.to/3nF9VdZ</a:t>
-            </a:r>
-            <a:r>
-              <a:rPr lang="en-US" sz="1400" b="0" i="0">
-                <a:solidFill>
-                  <a:srgbClr val="030303"/>
-                </a:solidFill>
-                <a:effectLst/>
-              </a:rPr>
-              <a:t>  (wax sticks)</a:t>
-            </a:r>
-          </a:p>
-          <a:p>
-            <a:pPr marL="285750" indent="-285750">
-              <a:buFont typeface="Arial" panose="020B0604020202020204" pitchFamily="34" charset="0"/>
-              <a:buChar char="•"/>
-            </a:pPr>
-            <a:r>
-              <a:rPr lang="en-US" sz="1400" b="0" i="0">
-                <a:solidFill>
-                  <a:srgbClr val="030303"/>
-                </a:solidFill>
-                <a:effectLst/>
-              </a:rPr>
-              <a:t>White Polishing Compound (akaJeweler's Rouge) </a:t>
-            </a:r>
-            <a:r>
-              <a:rPr lang="en-US" sz="1400" b="0" i="0">
-                <a:effectLst/>
-                <a:hlinkClick r:id="rId4"/>
-              </a:rPr>
-              <a:t>https://amzn.to/37zCl3k</a:t>
-            </a:r>
-            <a:r>
-              <a:rPr lang="en-US" sz="1400" b="0" i="0">
-                <a:solidFill>
-                  <a:srgbClr val="030303"/>
-                </a:solidFill>
-                <a:effectLst/>
-              </a:rPr>
-              <a:t> </a:t>
-            </a:r>
-          </a:p>
-          <a:p>
-            <a:pPr marL="285750" indent="-285750">
-              <a:buFont typeface="Arial" panose="020B0604020202020204" pitchFamily="34" charset="0"/>
-              <a:buChar char="•"/>
-            </a:pPr>
-            <a:r>
-              <a:rPr lang="en-US" sz="1400" b="0" i="0">
-                <a:solidFill>
-                  <a:srgbClr val="030303"/>
-                </a:solidFill>
-                <a:effectLst/>
-              </a:rPr>
-              <a:t>Silicone Carbide Grit </a:t>
-            </a:r>
-            <a:r>
-              <a:rPr lang="en-US" sz="1400" b="0" i="0">
-                <a:effectLst/>
-                <a:hlinkClick r:id="rId5"/>
-              </a:rPr>
-              <a:t>https://amzn.to/3arvlaC</a:t>
-            </a:r>
-            <a:r>
-              <a:rPr lang="en-US" sz="1400" b="0" i="0">
-                <a:effectLst/>
-              </a:rPr>
-              <a:t> (partickles)</a:t>
+              <a:t>https://tormek.com</a:t>
             </a:r>
             <a:endParaRPr lang="en-US" sz="1400"/>
-          </a:p>
-        </p:txBody>
-      </p:sp>
-      <p:sp>
-        <p:nvSpPr>
-          <p:cNvPr id="4" name="TextBox 3">
-            <a:extLst>
-              <a:ext uri="{FF2B5EF4-FFF2-40B4-BE49-F238E27FC236}">
-                <a16:creationId xmlns:a16="http://schemas.microsoft.com/office/drawing/2014/main" id="{096ADEC2-C058-CAD8-63E3-3313F9EA4182}"/>
-              </a:ext>
-            </a:extLst>
-          </p:cNvPr>
-          <p:cNvSpPr txBox="1"/>
-          <p:nvPr/>
-        </p:nvSpPr>
-        <p:spPr>
-          <a:xfrm>
-            <a:off x="134911" y="134911"/>
-            <a:ext cx="5531371" cy="954107"/>
-          </a:xfrm>
-          <a:prstGeom prst="rect">
-            <a:avLst/>
-          </a:prstGeom>
-          <a:noFill/>
-        </p:spPr>
-        <p:txBody>
-          <a:bodyPr wrap="square" rtlCol="0">
-            <a:spAutoFit/>
-          </a:bodyPr>
-          <a:lstStyle/>
-          <a:p>
-            <a:r>
-              <a:rPr lang="en-US" sz="2800" b="1"/>
-              <a:t>Sharpening with </a:t>
-            </a:r>
-            <a:r>
-              <a:rPr lang="en-US" sz="2800" b="1">
-                <a:solidFill>
-                  <a:srgbClr val="FF0000"/>
-                </a:solidFill>
-              </a:rPr>
-              <a:t>MDF </a:t>
-            </a:r>
-            <a:br>
-              <a:rPr lang="en-US" sz="2800" b="1">
-                <a:solidFill>
-                  <a:srgbClr val="FF0000"/>
-                </a:solidFill>
-              </a:rPr>
-            </a:br>
-            <a:r>
-              <a:rPr lang="en-US" sz="2800" b="1">
-                <a:solidFill>
-                  <a:srgbClr val="FF0000"/>
-                </a:solidFill>
-              </a:rPr>
-              <a:t>(</a:t>
-            </a:r>
-            <a:r>
-              <a:rPr lang="en-US" sz="2800" b="1" i="0">
-                <a:solidFill>
-                  <a:srgbClr val="FF0000"/>
-                </a:solidFill>
-                <a:effectLst/>
-              </a:rPr>
-              <a:t>Medium Density Fibreboard</a:t>
-            </a:r>
-            <a:r>
-              <a:rPr lang="en-US" sz="2800" b="1">
-                <a:solidFill>
-                  <a:srgbClr val="FF0000"/>
-                </a:solidFill>
-              </a:rPr>
-              <a:t>)</a:t>
-            </a:r>
-          </a:p>
-        </p:txBody>
-      </p:sp>
-      <p:sp>
-        <p:nvSpPr>
-          <p:cNvPr id="5" name="TextBox 4">
-            <a:extLst>
-              <a:ext uri="{FF2B5EF4-FFF2-40B4-BE49-F238E27FC236}">
-                <a16:creationId xmlns:a16="http://schemas.microsoft.com/office/drawing/2014/main" id="{4439ACD2-5C09-D8CB-C266-4263A4DD7ED3}"/>
-              </a:ext>
-            </a:extLst>
-          </p:cNvPr>
-          <p:cNvSpPr txBox="1"/>
-          <p:nvPr/>
-        </p:nvSpPr>
-        <p:spPr>
-          <a:xfrm>
-            <a:off x="262327" y="5019473"/>
-            <a:ext cx="5276538" cy="1600438"/>
-          </a:xfrm>
-          <a:prstGeom prst="rect">
-            <a:avLst/>
-          </a:prstGeom>
-          <a:noFill/>
-        </p:spPr>
-        <p:txBody>
-          <a:bodyPr wrap="square" rtlCol="0">
-            <a:spAutoFit/>
-          </a:bodyPr>
-          <a:lstStyle/>
-          <a:p>
-            <a:pPr marL="285750" indent="-285750">
-              <a:buFont typeface="Arial" panose="020B0604020202020204" pitchFamily="34" charset="0"/>
-              <a:buChar char="•"/>
-            </a:pPr>
-            <a:r>
-              <a:rPr lang="en-US" sz="1400" b="0" i="0">
-                <a:solidFill>
-                  <a:srgbClr val="0F1111"/>
-                </a:solidFill>
-                <a:effectLst/>
-                <a:hlinkClick r:id="rId6"/>
-              </a:rPr>
-              <a:t>https://www.amazon.com/Razor-Sharp-Edgemaking-System-Kit/dp/B0002IXQD8/</a:t>
-            </a:r>
-            <a:endParaRPr lang="en-US" sz="1400" b="0" i="0">
-              <a:solidFill>
-                <a:srgbClr val="0F1111"/>
-              </a:solidFill>
-              <a:effectLst/>
-            </a:endParaRPr>
-          </a:p>
-          <a:p>
-            <a:pPr marL="285750" indent="-285750">
-              <a:buFont typeface="Arial" panose="020B0604020202020204" pitchFamily="34" charset="0"/>
-              <a:buChar char="•"/>
-            </a:pPr>
-            <a:r>
-              <a:rPr lang="en-US" sz="1400" b="0" i="0">
-                <a:solidFill>
-                  <a:srgbClr val="0F1111"/>
-                </a:solidFill>
-                <a:effectLst/>
-              </a:rPr>
-              <a:t>This most popular eight inch kit is made to fit </a:t>
-            </a:r>
-          </a:p>
-          <a:p>
-            <a:pPr marL="285750" indent="-285750">
-              <a:buFont typeface="Arial" panose="020B0604020202020204" pitchFamily="34" charset="0"/>
-              <a:buChar char="•"/>
-            </a:pPr>
-            <a:r>
-              <a:rPr lang="en-US" sz="1400" b="0" i="0">
-                <a:solidFill>
-                  <a:srgbClr val="0F1111"/>
-                </a:solidFill>
-                <a:effectLst/>
-              </a:rPr>
-              <a:t>ordinary 5 or 6 inch bench grinder or buffer motor. </a:t>
-            </a:r>
-          </a:p>
-          <a:p>
-            <a:pPr marL="285750" indent="-285750">
-              <a:buFont typeface="Arial" panose="020B0604020202020204" pitchFamily="34" charset="0"/>
-              <a:buChar char="•"/>
-            </a:pPr>
-            <a:r>
-              <a:rPr lang="en-US" sz="1400" b="0" i="0">
-                <a:solidFill>
-                  <a:srgbClr val="0F1111"/>
-                </a:solidFill>
-                <a:effectLst/>
-              </a:rPr>
-              <a:t>The wheels are most efficient turning over 3000 RPMs. </a:t>
-            </a:r>
-          </a:p>
-          <a:p>
-            <a:pPr marL="285750" indent="-285750">
-              <a:buFont typeface="Arial" panose="020B0604020202020204" pitchFamily="34" charset="0"/>
-              <a:buChar char="•"/>
-            </a:pPr>
-            <a:r>
-              <a:rPr lang="en-US" sz="1400" b="0" i="0">
-                <a:solidFill>
-                  <a:srgbClr val="0F1111"/>
-                </a:solidFill>
-                <a:effectLst/>
-              </a:rPr>
-              <a:t>The wheels in a standard 8 inch </a:t>
-            </a:r>
-          </a:p>
-          <a:p>
-            <a:pPr marL="285750" indent="-285750">
-              <a:buFont typeface="Arial" panose="020B0604020202020204" pitchFamily="34" charset="0"/>
-              <a:buChar char="•"/>
-            </a:pPr>
-            <a:r>
-              <a:rPr lang="en-US" sz="1400" b="0" i="0">
-                <a:solidFill>
-                  <a:srgbClr val="0F1111"/>
-                </a:solidFill>
-                <a:effectLst/>
-              </a:rPr>
-              <a:t>Deluxe Kit are 8 in by 3/4 in with a 5/8 in arbor hole.</a:t>
-            </a:r>
           </a:p>
         </p:txBody>
       </p:sp>
       <p:pic>
         <p:nvPicPr>
-          <p:cNvPr id="6" name="Picture 5">
-            <a:extLst>
-              <a:ext uri="{FF2B5EF4-FFF2-40B4-BE49-F238E27FC236}">
-                <a16:creationId xmlns:a16="http://schemas.microsoft.com/office/drawing/2014/main" id="{C5E8B587-926A-0342-34EA-9FB25D2385C8}"/>
+          <p:cNvPr id="4" name="Picture 3">
+            <a:extLst>
+              <a:ext uri="{FF2B5EF4-FFF2-40B4-BE49-F238E27FC236}">
+                <a16:creationId xmlns:a16="http://schemas.microsoft.com/office/drawing/2014/main" id="{C57AE118-8A8C-AB32-C125-73C41F0CB96A}"/>
               </a:ext>
             </a:extLst>
           </p:cNvPr>
@@ -5815,21 +6005,111 @@
           <p:nvPr/>
         </p:nvPicPr>
         <p:blipFill>
-          <a:blip r:embed="rId7" cstate="email">
-            <a:extLst>
-              <a:ext uri="{28A0092B-C50C-407E-A947-70E740481C1C}">
-                <a14:useLocalDpi xmlns:a14="http://schemas.microsoft.com/office/drawing/2010/main"/>
-              </a:ext>
-            </a:extLst>
-          </a:blip>
+          <a:blip r:embed="rId3"/>
           <a:stretch>
             <a:fillRect/>
           </a:stretch>
         </p:blipFill>
         <p:spPr>
           <a:xfrm>
-            <a:off x="672061" y="1520687"/>
-            <a:ext cx="3195922" cy="3263920"/>
+            <a:off x="6634958" y="1594194"/>
+            <a:ext cx="2207238" cy="2026221"/>
+          </a:xfrm>
+          <a:prstGeom prst="rect">
+            <a:avLst/>
+          </a:prstGeom>
+        </p:spPr>
+      </p:pic>
+      <p:sp>
+        <p:nvSpPr>
+          <p:cNvPr id="5" name="TextBox 4">
+            <a:extLst>
+              <a:ext uri="{FF2B5EF4-FFF2-40B4-BE49-F238E27FC236}">
+                <a16:creationId xmlns:a16="http://schemas.microsoft.com/office/drawing/2014/main" id="{A3AAF6C0-86B0-6691-06B1-CA8AF8DED5F0}"/>
+              </a:ext>
+            </a:extLst>
+          </p:cNvPr>
+          <p:cNvSpPr txBox="1"/>
+          <p:nvPr/>
+        </p:nvSpPr>
+        <p:spPr>
+          <a:xfrm>
+            <a:off x="267127" y="1006867"/>
+            <a:ext cx="2337527" cy="1384995"/>
+          </a:xfrm>
+          <a:prstGeom prst="rect">
+            <a:avLst/>
+          </a:prstGeom>
+          <a:solidFill>
+            <a:schemeClr val="accent4">
+              <a:lumMod val="20000"/>
+              <a:lumOff val="80000"/>
+            </a:schemeClr>
+          </a:solidFill>
+          <a:ln>
+            <a:solidFill>
+              <a:srgbClr val="FF0000"/>
+            </a:solidFill>
+          </a:ln>
+        </p:spPr>
+        <p:txBody>
+          <a:bodyPr wrap="square" rtlCol="0">
+            <a:spAutoFit/>
+          </a:bodyPr>
+          <a:lstStyle/>
+          <a:p>
+            <a:r>
+              <a:rPr lang="en-US" sz="1400"/>
+              <a:t>Electric sharpener</a:t>
+            </a:r>
+          </a:p>
+          <a:p>
+            <a:r>
+              <a:rPr lang="en-US" sz="1400"/>
+              <a:t>with water-cooled wheel</a:t>
+            </a:r>
+          </a:p>
+          <a:p>
+            <a:r>
+              <a:rPr lang="en-US" sz="1400"/>
+              <a:t>Prices $500 - $2,000</a:t>
+            </a:r>
+          </a:p>
+          <a:p>
+            <a:endParaRPr lang="en-US" sz="1400"/>
+          </a:p>
+          <a:p>
+            <a:r>
+              <a:rPr lang="en-US" sz="1400"/>
+              <a:t>There are knock-off models for much less ($150)</a:t>
+            </a:r>
+          </a:p>
+        </p:txBody>
+      </p:sp>
+      <p:pic>
+        <p:nvPicPr>
+          <p:cNvPr id="6" name="Picture 5">
+            <a:extLst>
+              <a:ext uri="{FF2B5EF4-FFF2-40B4-BE49-F238E27FC236}">
+                <a16:creationId xmlns:a16="http://schemas.microsoft.com/office/drawing/2014/main" id="{D75C8F73-E08E-E428-876A-8D651F831210}"/>
+              </a:ext>
+            </a:extLst>
+          </p:cNvPr>
+          <p:cNvPicPr>
+            <a:picLocks noChangeAspect="1"/>
+          </p:cNvPicPr>
+          <p:nvPr/>
+        </p:nvPicPr>
+        <p:blipFill>
+          <a:blip r:embed="rId4"/>
+          <a:stretch>
+            <a:fillRect/>
+          </a:stretch>
+        </p:blipFill>
+        <p:spPr>
+          <a:xfrm>
+            <a:off x="3290098" y="1498703"/>
+            <a:ext cx="2659415" cy="2026221"/>
           </a:xfrm>
           <a:prstGeom prst="rect">
             <a:avLst/>
@@ -5839,7 +6119,7 @@
     </p:spTree>
     <p:extLst>
       <p:ext uri="{BB962C8B-B14F-4D97-AF65-F5344CB8AC3E}">
-        <p14:creationId xmlns:p14="http://schemas.microsoft.com/office/powerpoint/2010/main" val="2731559214"/>
+        <p14:creationId xmlns:p14="http://schemas.microsoft.com/office/powerpoint/2010/main" val="3049046410"/>
       </p:ext>
     </p:extLst>
   </p:cSld>
@@ -5866,27 +6146,74 @@
           <a:chExt cx="0" cy="0"/>
         </a:xfrm>
       </p:grpSpPr>
-      <p:sp>
-        <p:nvSpPr>
-          <p:cNvPr id="2" name="TextBox 1">
-            <a:extLst>
-              <a:ext uri="{FF2B5EF4-FFF2-40B4-BE49-F238E27FC236}">
-                <a16:creationId xmlns:a16="http://schemas.microsoft.com/office/drawing/2014/main" id="{0CA081EB-3466-2BB0-8E97-6CF79A01E897}"/>
-              </a:ext>
-            </a:extLst>
-          </p:cNvPr>
-          <p:cNvSpPr txBox="1"/>
+      <p:pic>
+        <p:nvPicPr>
+          <p:cNvPr id="2050" name="Picture 2" descr="DIY MDF Sharpening Wheel (XL 10&quot;) - YouTube">
+            <a:extLst>
+              <a:ext uri="{FF2B5EF4-FFF2-40B4-BE49-F238E27FC236}">
+                <a16:creationId xmlns:a16="http://schemas.microsoft.com/office/drawing/2014/main" id="{4DE831BD-63D0-6612-0BBB-373CD741BCC2}"/>
+              </a:ext>
+            </a:extLst>
+          </p:cNvPr>
+          <p:cNvPicPr>
+            <a:picLocks noChangeAspect="1" noChangeArrowheads="1"/>
+          </p:cNvPicPr>
           <p:nvPr/>
-        </p:nvSpPr>
-        <p:spPr>
-          <a:xfrm>
-            <a:off x="495967" y="378994"/>
-            <a:ext cx="10476833" cy="3693319"/>
+        </p:nvPicPr>
+        <p:blipFill>
+          <a:blip r:embed="rId2" cstate="email">
+            <a:extLst>
+              <a:ext uri="{28A0092B-C50C-407E-A947-70E740481C1C}">
+                <a14:useLocalDpi xmlns:a14="http://schemas.microsoft.com/office/drawing/2010/main"/>
+              </a:ext>
+            </a:extLst>
+          </a:blip>
+          <a:srcRect/>
+          <a:stretch>
+            <a:fillRect/>
+          </a:stretch>
+        </p:blipFill>
+        <p:spPr bwMode="auto">
+          <a:xfrm>
+            <a:off x="7202773" y="453282"/>
+            <a:ext cx="4621967" cy="2599856"/>
           </a:xfrm>
           <a:prstGeom prst="rect">
             <a:avLst/>
           </a:prstGeom>
           <a:noFill/>
+          <a:extLst>
+            <a:ext uri="{909E8E84-426E-40DD-AFC4-6F175D3DCCD1}">
+              <a14:hiddenFill xmlns:a14="http://schemas.microsoft.com/office/drawing/2010/main">
+                <a:solidFill>
+                  <a:srgbClr val="FFFFFF"/>
+                </a:solidFill>
+              </a14:hiddenFill>
+            </a:ext>
+          </a:extLst>
+        </p:spPr>
+      </p:pic>
+      <p:sp>
+        <p:nvSpPr>
+          <p:cNvPr id="2" name="TextBox 1">
+            <a:extLst>
+              <a:ext uri="{FF2B5EF4-FFF2-40B4-BE49-F238E27FC236}">
+                <a16:creationId xmlns:a16="http://schemas.microsoft.com/office/drawing/2014/main" id="{53A27154-6F35-6637-45BF-A451AD32422C}"/>
+              </a:ext>
+            </a:extLst>
+          </p:cNvPr>
+          <p:cNvSpPr txBox="1"/>
+          <p:nvPr/>
+        </p:nvSpPr>
+        <p:spPr>
+          <a:xfrm>
+            <a:off x="7759906" y="3152647"/>
+            <a:ext cx="3507699" cy="276999"/>
+          </a:xfrm>
+          <a:prstGeom prst="rect">
+            <a:avLst/>
+          </a:prstGeom>
+          <a:noFill/>
         </p:spPr>
         <p:txBody>
           <a:bodyPr wrap="square" rtlCol="0">
@@ -5894,272 +6221,385 @@
           </a:bodyPr>
           <a:lstStyle/>
           <a:p>
-            <a:pPr rtl="0">
-              <a:spcBef>
-                <a:spcPts val="0"/>
-              </a:spcBef>
-              <a:spcAft>
-                <a:spcPts val="0"/>
-              </a:spcAft>
-            </a:pPr>
-            <a:r>
-              <a:rPr lang="en-US" sz="1800" b="0" i="0" u="none" strike="noStrike">
-                <a:solidFill>
-                  <a:srgbClr val="000000"/>
-                </a:solidFill>
-                <a:effectLst/>
-                <a:latin typeface="Arial" panose="020B0604020202020204" pitchFamily="34" charset="0"/>
-              </a:rPr>
-              <a:t>To buy</a:t>
-            </a:r>
-          </a:p>
-          <a:p>
-            <a:pPr rtl="0">
-              <a:spcBef>
-                <a:spcPts val="0"/>
-              </a:spcBef>
-              <a:spcAft>
-                <a:spcPts val="0"/>
-              </a:spcAft>
-            </a:pPr>
-            <a:endParaRPr lang="en-US" sz="1800" b="0" i="0" u="none" strike="noStrike">
-              <a:solidFill>
-                <a:srgbClr val="000000"/>
-              </a:solidFill>
-              <a:effectLst/>
-              <a:latin typeface="Arial" panose="020B0604020202020204" pitchFamily="34" charset="0"/>
-            </a:endParaRPr>
-          </a:p>
-          <a:p>
-            <a:pPr rtl="0">
-              <a:spcBef>
-                <a:spcPts val="0"/>
-              </a:spcBef>
-              <a:spcAft>
-                <a:spcPts val="0"/>
-              </a:spcAft>
-            </a:pPr>
-            <a:r>
-              <a:rPr lang="en-US" sz="1800" b="0" i="0" u="none" strike="noStrike">
-                <a:solidFill>
-                  <a:srgbClr val="000000"/>
-                </a:solidFill>
-                <a:effectLst/>
-                <a:latin typeface="Arial" panose="020B0604020202020204" pitchFamily="34" charset="0"/>
-              </a:rPr>
-              <a:t>12" Nicholson bastard file fine</a:t>
-            </a:r>
-          </a:p>
-          <a:p>
-            <a:r>
-              <a:rPr lang="en-US" sz="1800" b="0" i="0" u="none" strike="noStrike">
-                <a:solidFill>
-                  <a:srgbClr val="000000"/>
-                </a:solidFill>
-                <a:effectLst/>
-                <a:latin typeface="Arial" panose="020B0604020202020204" pitchFamily="34" charset="0"/>
-              </a:rPr>
-              <a:t>12" Nicholson bastard file coarse</a:t>
-            </a:r>
-          </a:p>
-          <a:p>
-            <a:pPr rtl="0">
-              <a:spcBef>
-                <a:spcPts val="0"/>
-              </a:spcBef>
-              <a:spcAft>
-                <a:spcPts val="0"/>
-              </a:spcAft>
-            </a:pPr>
-            <a:endParaRPr lang="en-US" b="0">
-              <a:effectLst/>
-            </a:endParaRPr>
-          </a:p>
-          <a:p>
-            <a:pPr rtl="0">
-              <a:spcBef>
-                <a:spcPts val="0"/>
-              </a:spcBef>
-              <a:spcAft>
-                <a:spcPts val="0"/>
-              </a:spcAft>
-            </a:pPr>
-            <a:r>
-              <a:rPr lang="en-US" sz="1800" b="0" i="0" u="none" strike="noStrike">
-                <a:solidFill>
-                  <a:srgbClr val="000000"/>
-                </a:solidFill>
-                <a:effectLst/>
-                <a:latin typeface="Arial" panose="020B0604020202020204" pitchFamily="34" charset="0"/>
-              </a:rPr>
-              <a:t>plastic handle over the wood</a:t>
-            </a:r>
-            <a:endParaRPr lang="en-US" b="0">
-              <a:effectLst/>
-            </a:endParaRPr>
-          </a:p>
-          <a:p>
-            <a:pPr rtl="0">
-              <a:spcBef>
-                <a:spcPts val="0"/>
-              </a:spcBef>
-              <a:spcAft>
-                <a:spcPts val="0"/>
-              </a:spcAft>
-            </a:pPr>
-            <a:r>
-              <a:rPr lang="en-US" sz="1800" b="0" i="0" u="none" strike="noStrike">
-                <a:solidFill>
-                  <a:srgbClr val="000000"/>
-                </a:solidFill>
-                <a:effectLst/>
-                <a:latin typeface="Arial" panose="020B0604020202020204" pitchFamily="34" charset="0"/>
-              </a:rPr>
-              <a:t>.. https://www.amazon.com/Nicholson-21474U-Universal-Handle/dp/B014IWD3OA/</a:t>
-            </a:r>
-          </a:p>
-          <a:p>
-            <a:pPr rtl="0">
-              <a:spcBef>
-                <a:spcPts val="0"/>
-              </a:spcBef>
-              <a:spcAft>
-                <a:spcPts val="0"/>
-              </a:spcAft>
-            </a:pPr>
-            <a:endParaRPr lang="en-US" sz="1800" b="0" i="0" u="none" strike="noStrike">
-              <a:solidFill>
-                <a:srgbClr val="000000"/>
-              </a:solidFill>
-              <a:effectLst/>
-              <a:latin typeface="Arial" panose="020B0604020202020204" pitchFamily="34" charset="0"/>
-            </a:endParaRPr>
-          </a:p>
-          <a:p>
-            <a:pPr rtl="0">
-              <a:spcBef>
-                <a:spcPts val="0"/>
-              </a:spcBef>
-              <a:spcAft>
-                <a:spcPts val="0"/>
-              </a:spcAft>
-            </a:pPr>
-            <a:r>
-              <a:rPr lang="en-US" sz="1800" b="0" i="0" u="none" strike="noStrike">
-                <a:solidFill>
-                  <a:srgbClr val="000000"/>
-                </a:solidFill>
-                <a:effectLst/>
-                <a:latin typeface="Arial" panose="020B0604020202020204" pitchFamily="34" charset="0"/>
-              </a:rPr>
-              <a:t>Nicholson file card (wire brush to clean the file)</a:t>
-            </a:r>
-          </a:p>
-          <a:p>
-            <a:pPr rtl="0">
-              <a:spcBef>
-                <a:spcPts val="0"/>
-              </a:spcBef>
-              <a:spcAft>
-                <a:spcPts val="0"/>
-              </a:spcAft>
-            </a:pPr>
-            <a:r>
-              <a:rPr lang="en-US" sz="1800" b="0" i="0" u="none" strike="noStrike">
-                <a:solidFill>
-                  <a:srgbClr val="000000"/>
-                </a:solidFill>
-                <a:effectLst/>
-                <a:latin typeface="Arial" panose="020B0604020202020204" pitchFamily="34" charset="0"/>
-              </a:rPr>
-              <a:t>.. </a:t>
-            </a:r>
-            <a:r>
-              <a:rPr lang="en-US" sz="1800" b="0" i="0" u="none" strike="noStrike">
-                <a:solidFill>
-                  <a:srgbClr val="000000"/>
-                </a:solidFill>
-                <a:effectLst/>
-                <a:latin typeface="Arial" panose="020B0604020202020204" pitchFamily="34" charset="0"/>
-                <a:hlinkClick r:id="rId2"/>
-              </a:rPr>
-              <a:t>https://www.amazon.com/Nicholson-File-Card-Brush-Pack/dp/B001KVM2H2/</a:t>
-            </a:r>
-            <a:endParaRPr lang="en-US" sz="1800" b="0" i="0" u="none" strike="noStrike">
-              <a:solidFill>
-                <a:srgbClr val="000000"/>
-              </a:solidFill>
-              <a:effectLst/>
-              <a:latin typeface="Arial" panose="020B0604020202020204" pitchFamily="34" charset="0"/>
-            </a:endParaRPr>
-          </a:p>
-          <a:p>
-            <a:pPr rtl="0">
-              <a:spcBef>
-                <a:spcPts val="0"/>
-              </a:spcBef>
-              <a:spcAft>
-                <a:spcPts val="0"/>
-              </a:spcAft>
-            </a:pPr>
-            <a:endParaRPr lang="en-US">
-              <a:solidFill>
-                <a:srgbClr val="000000"/>
-              </a:solidFill>
-              <a:latin typeface="Arial" panose="020B0604020202020204" pitchFamily="34" charset="0"/>
-            </a:endParaRPr>
-          </a:p>
-          <a:p>
-            <a:r>
-              <a:rPr lang="en-US" b="0" i="0">
-                <a:solidFill>
-                  <a:srgbClr val="0F1111"/>
-                </a:solidFill>
-                <a:effectLst/>
-                <a:latin typeface="Amazon Ember"/>
-              </a:rPr>
-              <a:t>Lansky Sharpeners The Puck Dual Grit Multi Purpose Knife Sharpener 2 Pack</a:t>
-            </a:r>
-            <a:endParaRPr lang="en-US" b="0">
-              <a:solidFill>
-                <a:srgbClr val="000000"/>
-              </a:solidFill>
-              <a:effectLst/>
-              <a:latin typeface="Arial" panose="020B0604020202020204" pitchFamily="34" charset="0"/>
-            </a:endParaRPr>
-          </a:p>
-          <a:p>
-            <a:pPr rtl="0">
-              <a:spcBef>
-                <a:spcPts val="0"/>
-              </a:spcBef>
-              <a:spcAft>
-                <a:spcPts val="0"/>
-              </a:spcAft>
-            </a:pPr>
-            <a:r>
-              <a:rPr lang="en-US" b="0">
+            <a:r>
+              <a:rPr lang="en-US" sz="1200"/>
+              <a:t>https://www.youtube.com/watch?v=f2vvihhr238</a:t>
+            </a:r>
+          </a:p>
+        </p:txBody>
+      </p:sp>
+      <p:sp>
+        <p:nvSpPr>
+          <p:cNvPr id="3" name="TextBox 2">
+            <a:extLst>
+              <a:ext uri="{FF2B5EF4-FFF2-40B4-BE49-F238E27FC236}">
+                <a16:creationId xmlns:a16="http://schemas.microsoft.com/office/drawing/2014/main" id="{5BCB6A15-1BBB-8ED7-417E-38EFF2488CA7}"/>
+              </a:ext>
+            </a:extLst>
+          </p:cNvPr>
+          <p:cNvSpPr txBox="1"/>
+          <p:nvPr/>
+        </p:nvSpPr>
+        <p:spPr>
+          <a:xfrm>
+            <a:off x="5993566" y="3531900"/>
+            <a:ext cx="5831174" cy="954107"/>
+          </a:xfrm>
+          <a:prstGeom prst="rect">
+            <a:avLst/>
+          </a:prstGeom>
+          <a:noFill/>
+        </p:spPr>
+        <p:txBody>
+          <a:bodyPr wrap="square" rtlCol="0">
+            <a:spAutoFit/>
+          </a:bodyPr>
+          <a:lstStyle/>
+          <a:p>
+            <a:r>
+              <a:rPr lang="en-US" sz="1400" b="0" i="0">
+                <a:solidFill>
+                  <a:srgbClr val="030303"/>
+                </a:solidFill>
                 <a:effectLst/>
               </a:rPr>
-              <a:t>.. </a:t>
-            </a:r>
-            <a:r>
-              <a:rPr lang="en-US" b="0">
+              <a:t>I used scrap MDF and bought the the other supplies, links below. </a:t>
+            </a:r>
+          </a:p>
+          <a:p>
+            <a:pPr marL="285750" indent="-285750">
+              <a:buFont typeface="Arial" panose="020B0604020202020204" pitchFamily="34" charset="0"/>
+              <a:buChar char="•"/>
+            </a:pPr>
+            <a:r>
+              <a:rPr lang="en-US" sz="1400" b="0" i="0">
+                <a:solidFill>
+                  <a:srgbClr val="030303"/>
+                </a:solidFill>
+                <a:effectLst/>
+              </a:rPr>
+              <a:t>Beeswax </a:t>
+            </a:r>
+            <a:r>
+              <a:rPr lang="en-US" sz="1400" b="0" i="0">
                 <a:effectLst/>
                 <a:hlinkClick r:id="rId3"/>
               </a:rPr>
-              <a:t>https://www.amazon.com/Lansky-Sharpeners-Multi-Purpose-Sharpener/dp/B017T2GG6I/</a:t>
-            </a:r>
-            <a:endParaRPr lang="en-US" b="0">
+              <a:t>https://amzn.to/3nF9VdZ</a:t>
+            </a:r>
+            <a:r>
+              <a:rPr lang="en-US" sz="1400" b="0" i="0">
+                <a:solidFill>
+                  <a:srgbClr val="030303"/>
+                </a:solidFill>
+                <a:effectLst/>
+              </a:rPr>
+              <a:t>  (wax sticks)</a:t>
+            </a:r>
+          </a:p>
+          <a:p>
+            <a:pPr marL="285750" indent="-285750">
+              <a:buFont typeface="Arial" panose="020B0604020202020204" pitchFamily="34" charset="0"/>
+              <a:buChar char="•"/>
+            </a:pPr>
+            <a:r>
+              <a:rPr lang="en-US" sz="1400" b="0" i="0">
+                <a:solidFill>
+                  <a:srgbClr val="030303"/>
+                </a:solidFill>
+                <a:effectLst/>
+              </a:rPr>
+              <a:t>White Polishing Compound (akaJeweler's Rouge) </a:t>
+            </a:r>
+            <a:r>
+              <a:rPr lang="en-US" sz="1400" b="0" i="0">
+                <a:effectLst/>
+                <a:hlinkClick r:id="rId4"/>
+              </a:rPr>
+              <a:t>https://amzn.to/37zCl3k</a:t>
+            </a:r>
+            <a:r>
+              <a:rPr lang="en-US" sz="1400" b="0" i="0">
+                <a:solidFill>
+                  <a:srgbClr val="030303"/>
+                </a:solidFill>
+                <a:effectLst/>
+              </a:rPr>
+              <a:t> </a:t>
+            </a:r>
+          </a:p>
+          <a:p>
+            <a:pPr marL="285750" indent="-285750">
+              <a:buFont typeface="Arial" panose="020B0604020202020204" pitchFamily="34" charset="0"/>
+              <a:buChar char="•"/>
+            </a:pPr>
+            <a:r>
+              <a:rPr lang="en-US" sz="1400" b="0" i="0">
+                <a:solidFill>
+                  <a:srgbClr val="030303"/>
+                </a:solidFill>
+                <a:effectLst/>
+              </a:rPr>
+              <a:t>Silicone Carbide Grit </a:t>
+            </a:r>
+            <a:r>
+              <a:rPr lang="en-US" sz="1400" b="0" i="0">
+                <a:effectLst/>
+                <a:hlinkClick r:id="rId5"/>
+              </a:rPr>
+              <a:t>https://amzn.to/3arvlaC</a:t>
+            </a:r>
+            <a:r>
+              <a:rPr lang="en-US" sz="1400" b="0" i="0">
+                <a:effectLst/>
+              </a:rPr>
+              <a:t> (partickles)</a:t>
+            </a:r>
+            <a:endParaRPr lang="en-US" sz="1400"/>
+          </a:p>
+        </p:txBody>
+      </p:sp>
+      <p:sp>
+        <p:nvSpPr>
+          <p:cNvPr id="4" name="TextBox 3">
+            <a:extLst>
+              <a:ext uri="{FF2B5EF4-FFF2-40B4-BE49-F238E27FC236}">
+                <a16:creationId xmlns:a16="http://schemas.microsoft.com/office/drawing/2014/main" id="{096ADEC2-C058-CAD8-63E3-3313F9EA4182}"/>
+              </a:ext>
+            </a:extLst>
+          </p:cNvPr>
+          <p:cNvSpPr txBox="1"/>
+          <p:nvPr/>
+        </p:nvSpPr>
+        <p:spPr>
+          <a:xfrm>
+            <a:off x="134911" y="134911"/>
+            <a:ext cx="5531371" cy="954107"/>
+          </a:xfrm>
+          <a:prstGeom prst="rect">
+            <a:avLst/>
+          </a:prstGeom>
+          <a:noFill/>
+        </p:spPr>
+        <p:txBody>
+          <a:bodyPr wrap="square" rtlCol="0">
+            <a:spAutoFit/>
+          </a:bodyPr>
+          <a:lstStyle/>
+          <a:p>
+            <a:r>
+              <a:rPr lang="en-US" sz="2800" b="1"/>
+              <a:t>Sharpening with </a:t>
+            </a:r>
+            <a:r>
+              <a:rPr lang="en-US" sz="2800" b="1">
+                <a:solidFill>
+                  <a:srgbClr val="FF0000"/>
+                </a:solidFill>
+              </a:rPr>
+              <a:t>MDF </a:t>
+            </a:r>
+            <a:br>
+              <a:rPr lang="en-US" sz="2800" b="1">
+                <a:solidFill>
+                  <a:srgbClr val="FF0000"/>
+                </a:solidFill>
+              </a:rPr>
+            </a:br>
+            <a:r>
+              <a:rPr lang="en-US" sz="2800" b="1">
+                <a:solidFill>
+                  <a:srgbClr val="FF0000"/>
+                </a:solidFill>
+              </a:rPr>
+              <a:t>(</a:t>
+            </a:r>
+            <a:r>
+              <a:rPr lang="en-US" sz="2800" b="1" i="0">
+                <a:solidFill>
+                  <a:srgbClr val="FF0000"/>
+                </a:solidFill>
+                <a:effectLst/>
+              </a:rPr>
+              <a:t>Medium Density Fibreboard</a:t>
+            </a:r>
+            <a:r>
+              <a:rPr lang="en-US" sz="2800" b="1">
+                <a:solidFill>
+                  <a:srgbClr val="FF0000"/>
+                </a:solidFill>
+              </a:rPr>
+              <a:t>)</a:t>
+            </a:r>
+          </a:p>
+        </p:txBody>
+      </p:sp>
+      <p:sp>
+        <p:nvSpPr>
+          <p:cNvPr id="5" name="TextBox 4">
+            <a:extLst>
+              <a:ext uri="{FF2B5EF4-FFF2-40B4-BE49-F238E27FC236}">
+                <a16:creationId xmlns:a16="http://schemas.microsoft.com/office/drawing/2014/main" id="{4439ACD2-5C09-D8CB-C266-4263A4DD7ED3}"/>
+              </a:ext>
+            </a:extLst>
+          </p:cNvPr>
+          <p:cNvSpPr txBox="1"/>
+          <p:nvPr/>
+        </p:nvSpPr>
+        <p:spPr>
+          <a:xfrm>
+            <a:off x="262327" y="5019473"/>
+            <a:ext cx="5276538" cy="1600438"/>
+          </a:xfrm>
+          <a:prstGeom prst="rect">
+            <a:avLst/>
+          </a:prstGeom>
+          <a:noFill/>
+        </p:spPr>
+        <p:txBody>
+          <a:bodyPr wrap="square" rtlCol="0">
+            <a:spAutoFit/>
+          </a:bodyPr>
+          <a:lstStyle/>
+          <a:p>
+            <a:pPr marL="285750" indent="-285750">
+              <a:buFont typeface="Arial" panose="020B0604020202020204" pitchFamily="34" charset="0"/>
+              <a:buChar char="•"/>
+            </a:pPr>
+            <a:r>
+              <a:rPr lang="en-US" sz="1400" b="0" i="0">
+                <a:solidFill>
+                  <a:srgbClr val="0F1111"/>
+                </a:solidFill>
+                <a:effectLst/>
+                <a:hlinkClick r:id="rId6"/>
+              </a:rPr>
+              <a:t>https://www.amazon.com/Razor-Sharp-Edgemaking-System-Kit/dp/B0002IXQD8/</a:t>
+            </a:r>
+            <a:endParaRPr lang="en-US" sz="1400" b="0" i="0">
+              <a:solidFill>
+                <a:srgbClr val="0F1111"/>
+              </a:solidFill>
               <a:effectLst/>
             </a:endParaRPr>
           </a:p>
-        </p:txBody>
-      </p:sp>
+          <a:p>
+            <a:pPr marL="285750" indent="-285750">
+              <a:buFont typeface="Arial" panose="020B0604020202020204" pitchFamily="34" charset="0"/>
+              <a:buChar char="•"/>
+            </a:pPr>
+            <a:r>
+              <a:rPr lang="en-US" sz="1400" b="0" i="0">
+                <a:solidFill>
+                  <a:srgbClr val="0F1111"/>
+                </a:solidFill>
+                <a:effectLst/>
+              </a:rPr>
+              <a:t>This most popular eight inch kit is made to fit </a:t>
+            </a:r>
+          </a:p>
+          <a:p>
+            <a:pPr marL="285750" indent="-285750">
+              <a:buFont typeface="Arial" panose="020B0604020202020204" pitchFamily="34" charset="0"/>
+              <a:buChar char="•"/>
+            </a:pPr>
+            <a:r>
+              <a:rPr lang="en-US" sz="1400" b="0" i="0">
+                <a:solidFill>
+                  <a:srgbClr val="0F1111"/>
+                </a:solidFill>
+                <a:effectLst/>
+              </a:rPr>
+              <a:t>ordinary 5 or 6 inch bench grinder or buffer motor. </a:t>
+            </a:r>
+          </a:p>
+          <a:p>
+            <a:pPr marL="285750" indent="-285750">
+              <a:buFont typeface="Arial" panose="020B0604020202020204" pitchFamily="34" charset="0"/>
+              <a:buChar char="•"/>
+            </a:pPr>
+            <a:r>
+              <a:rPr lang="en-US" sz="1400" b="0" i="0">
+                <a:solidFill>
+                  <a:srgbClr val="0F1111"/>
+                </a:solidFill>
+                <a:effectLst/>
+              </a:rPr>
+              <a:t>The wheels are most efficient turning over 3000 RPMs. </a:t>
+            </a:r>
+          </a:p>
+          <a:p>
+            <a:pPr marL="285750" indent="-285750">
+              <a:buFont typeface="Arial" panose="020B0604020202020204" pitchFamily="34" charset="0"/>
+              <a:buChar char="•"/>
+            </a:pPr>
+            <a:r>
+              <a:rPr lang="en-US" sz="1400" b="0" i="0">
+                <a:solidFill>
+                  <a:srgbClr val="0F1111"/>
+                </a:solidFill>
+                <a:effectLst/>
+              </a:rPr>
+              <a:t>The wheels in a standard 8 inch </a:t>
+            </a:r>
+          </a:p>
+          <a:p>
+            <a:pPr marL="285750" indent="-285750">
+              <a:buFont typeface="Arial" panose="020B0604020202020204" pitchFamily="34" charset="0"/>
+              <a:buChar char="•"/>
+            </a:pPr>
+            <a:r>
+              <a:rPr lang="en-US" sz="1400" b="0" i="0">
+                <a:solidFill>
+                  <a:srgbClr val="0F1111"/>
+                </a:solidFill>
+                <a:effectLst/>
+              </a:rPr>
+              <a:t>Deluxe Kit are 8 in by 3/4 in with a 5/8 in arbor hole.</a:t>
+            </a:r>
+          </a:p>
+        </p:txBody>
+      </p:sp>
+      <p:pic>
+        <p:nvPicPr>
+          <p:cNvPr id="6" name="Picture 5">
+            <a:extLst>
+              <a:ext uri="{FF2B5EF4-FFF2-40B4-BE49-F238E27FC236}">
+                <a16:creationId xmlns:a16="http://schemas.microsoft.com/office/drawing/2014/main" id="{C5E8B587-926A-0342-34EA-9FB25D2385C8}"/>
+              </a:ext>
+            </a:extLst>
+          </p:cNvPr>
+          <p:cNvPicPr>
+            <a:picLocks noChangeAspect="1"/>
+          </p:cNvPicPr>
+          <p:nvPr/>
+        </p:nvPicPr>
+        <p:blipFill>
+          <a:blip r:embed="rId7" cstate="email">
+            <a:extLst>
+              <a:ext uri="{28A0092B-C50C-407E-A947-70E740481C1C}">
+                <a14:useLocalDpi xmlns:a14="http://schemas.microsoft.com/office/drawing/2010/main"/>
+              </a:ext>
+            </a:extLst>
+          </a:blip>
+          <a:stretch>
+            <a:fillRect/>
+          </a:stretch>
+        </p:blipFill>
+        <p:spPr>
+          <a:xfrm>
+            <a:off x="672061" y="1520687"/>
+            <a:ext cx="3195922" cy="3263920"/>
+          </a:xfrm>
+          <a:prstGeom prst="rect">
+            <a:avLst/>
+          </a:prstGeom>
+        </p:spPr>
+      </p:pic>
     </p:spTree>
     <p:extLst>
       <p:ext uri="{BB962C8B-B14F-4D97-AF65-F5344CB8AC3E}">
-        <p14:creationId xmlns:p14="http://schemas.microsoft.com/office/powerpoint/2010/main" val="3170050163"/>
+        <p14:creationId xmlns:p14="http://schemas.microsoft.com/office/powerpoint/2010/main" val="2731559214"/>
       </p:ext>
     </p:extLst>
   </p:cSld>
@@ -6186,84 +6626,27 @@
           <a:chExt cx="0" cy="0"/>
         </a:xfrm>
       </p:grpSpPr>
-      <p:pic>
-        <p:nvPicPr>
-          <p:cNvPr id="9" name="Picture 2" descr="Gransfors Bruks Small Forest Axe">
-            <a:extLst>
-              <a:ext uri="{FF2B5EF4-FFF2-40B4-BE49-F238E27FC236}">
-                <a16:creationId xmlns:a16="http://schemas.microsoft.com/office/drawing/2014/main" id="{FB00E50E-FFBA-284A-53BC-3BC03B3D2D30}"/>
-              </a:ext>
-            </a:extLst>
-          </p:cNvPr>
-          <p:cNvPicPr>
-            <a:picLocks noChangeAspect="1" noChangeArrowheads="1"/>
-          </p:cNvPicPr>
+      <p:sp>
+        <p:nvSpPr>
+          <p:cNvPr id="2" name="TextBox 1">
+            <a:extLst>
+              <a:ext uri="{FF2B5EF4-FFF2-40B4-BE49-F238E27FC236}">
+                <a16:creationId xmlns:a16="http://schemas.microsoft.com/office/drawing/2014/main" id="{0CA081EB-3466-2BB0-8E97-6CF79A01E897}"/>
+              </a:ext>
+            </a:extLst>
+          </p:cNvPr>
+          <p:cNvSpPr txBox="1"/>
           <p:nvPr/>
-        </p:nvPicPr>
-        <p:blipFill>
-          <a:blip r:embed="rId2" cstate="email">
-            <a:extLst>
-              <a:ext uri="{28A0092B-C50C-407E-A947-70E740481C1C}">
-                <a14:useLocalDpi xmlns:a14="http://schemas.microsoft.com/office/drawing/2010/main"/>
-              </a:ext>
-            </a:extLst>
-          </a:blip>
-          <a:srcRect/>
-          <a:stretch>
-            <a:fillRect/>
-          </a:stretch>
-        </p:blipFill>
-        <p:spPr bwMode="auto">
-          <a:xfrm>
-            <a:off x="4068231" y="1501320"/>
-            <a:ext cx="3045241" cy="3045241"/>
+        </p:nvSpPr>
+        <p:spPr>
+          <a:xfrm>
+            <a:off x="495967" y="378994"/>
+            <a:ext cx="10476833" cy="3693319"/>
           </a:xfrm>
           <a:prstGeom prst="rect">
             <a:avLst/>
           </a:prstGeom>
           <a:noFill/>
-          <a:extLst>
-            <a:ext uri="{909E8E84-426E-40DD-AFC4-6F175D3DCCD1}">
-              <a14:hiddenFill xmlns:a14="http://schemas.microsoft.com/office/drawing/2010/main">
-                <a:solidFill>
-                  <a:srgbClr val="FFFFFF"/>
-                </a:solidFill>
-              </a14:hiddenFill>
-            </a:ext>
-          </a:extLst>
-        </p:spPr>
-      </p:pic>
-      <p:sp>
-        <p:nvSpPr>
-          <p:cNvPr id="2" name="TextBox 1">
-            <a:extLst>
-              <a:ext uri="{FF2B5EF4-FFF2-40B4-BE49-F238E27FC236}">
-                <a16:creationId xmlns:a16="http://schemas.microsoft.com/office/drawing/2014/main" id="{5F93A89F-48F8-F097-8A70-8C56B8D7826A}"/>
-              </a:ext>
-            </a:extLst>
-          </p:cNvPr>
-          <p:cNvSpPr txBox="1"/>
-          <p:nvPr/>
-        </p:nvSpPr>
-        <p:spPr>
-          <a:xfrm>
-            <a:off x="229152" y="335746"/>
-            <a:ext cx="4698447" cy="954107"/>
-          </a:xfrm>
-          <a:prstGeom prst="rect">
-            <a:avLst/>
-          </a:prstGeom>
-          <a:solidFill>
-            <a:schemeClr val="accent4">
-              <a:lumMod val="20000"/>
-              <a:lumOff val="80000"/>
-            </a:schemeClr>
-          </a:solidFill>
-          <a:ln>
-            <a:solidFill>
-              <a:srgbClr val="FF0000"/>
-            </a:solidFill>
-          </a:ln>
         </p:spPr>
         <p:txBody>
           <a:bodyPr wrap="square" rtlCol="0">
@@ -6271,493 +6654,272 @@
           </a:bodyPr>
           <a:lstStyle/>
           <a:p>
-            <a:r>
-              <a:rPr lang="en-US" sz="1400"/>
-              <a:t>Ax – American English</a:t>
-            </a:r>
-          </a:p>
-          <a:p>
-            <a:r>
-              <a:rPr lang="en-US" sz="1400"/>
-              <a:t>Axe – British English</a:t>
-            </a:r>
-          </a:p>
-          <a:p>
-            <a:r>
-              <a:rPr lang="en-US" sz="1400"/>
-              <a:t>Hatchet – small ax (carpenter's hatchet or camper hatchet)</a:t>
-            </a:r>
-          </a:p>
-          <a:p>
-            <a:r>
-              <a:rPr lang="en-US" sz="1400"/>
-              <a:t>Maul – long-handled ax for splitting wood</a:t>
-            </a:r>
-          </a:p>
-        </p:txBody>
-      </p:sp>
-      <p:sp>
-        <p:nvSpPr>
-          <p:cNvPr id="3" name="TextBox 2">
-            <a:extLst>
-              <a:ext uri="{FF2B5EF4-FFF2-40B4-BE49-F238E27FC236}">
-                <a16:creationId xmlns:a16="http://schemas.microsoft.com/office/drawing/2014/main" id="{2676F06D-C960-8F25-137E-32AD61786E53}"/>
-              </a:ext>
-            </a:extLst>
-          </p:cNvPr>
-          <p:cNvSpPr txBox="1"/>
-          <p:nvPr/>
-        </p:nvSpPr>
-        <p:spPr>
-          <a:xfrm>
-            <a:off x="7534972" y="4106517"/>
-            <a:ext cx="2475947" cy="2246769"/>
-          </a:xfrm>
-          <a:prstGeom prst="rect">
-            <a:avLst/>
-          </a:prstGeom>
-          <a:solidFill>
-            <a:schemeClr val="accent4">
-              <a:lumMod val="20000"/>
-              <a:lumOff val="80000"/>
-            </a:schemeClr>
-          </a:solidFill>
-          <a:ln>
-            <a:solidFill>
-              <a:srgbClr val="FF0000"/>
-            </a:solidFill>
-          </a:ln>
-        </p:spPr>
-        <p:txBody>
-          <a:bodyPr wrap="square" rtlCol="0">
-            <a:spAutoFit/>
-          </a:bodyPr>
-          <a:lstStyle/>
-          <a:p>
-            <a:r>
-              <a:rPr lang="en-US" sz="1400"/>
-              <a:t>Maul Ax</a:t>
-            </a:r>
-          </a:p>
-          <a:p>
-            <a:r>
-              <a:rPr lang="en-US" sz="1400"/>
-              <a:t>A splitting maul also known as a block buster, block splitter, chop and maul, sledge axe, go-devil or hamaxe is a heavy, long-handled axe used for splitting a piece of wood along its grain. One side of its head is like a sledgehammer, and the other side is like an axe.</a:t>
-            </a:r>
-          </a:p>
-        </p:txBody>
-      </p:sp>
-      <p:pic>
-        <p:nvPicPr>
-          <p:cNvPr id="1026" name="Picture 2" descr="Maul vs. Axe | Autumn 2006 | Knots and Bolts">
-            <a:extLst>
-              <a:ext uri="{FF2B5EF4-FFF2-40B4-BE49-F238E27FC236}">
-                <a16:creationId xmlns:a16="http://schemas.microsoft.com/office/drawing/2014/main" id="{2004517B-E375-E065-AE1E-1DEBCB882222}"/>
-              </a:ext>
-            </a:extLst>
-          </p:cNvPr>
-          <p:cNvPicPr>
-            <a:picLocks noChangeAspect="1" noChangeArrowheads="1"/>
-          </p:cNvPicPr>
-          <p:nvPr/>
-        </p:nvPicPr>
-        <p:blipFill rotWithShape="1">
-          <a:blip r:embed="rId3" cstate="email">
-            <a:extLst>
-              <a:ext uri="{28A0092B-C50C-407E-A947-70E740481C1C}">
-                <a14:useLocalDpi xmlns:a14="http://schemas.microsoft.com/office/drawing/2010/main"/>
-              </a:ext>
-            </a:extLst>
-          </a:blip>
-          <a:srcRect/>
-          <a:stretch/>
-        </p:blipFill>
-        <p:spPr bwMode="auto">
-          <a:xfrm>
-            <a:off x="7346954" y="829819"/>
-            <a:ext cx="3045241" cy="2527300"/>
-          </a:xfrm>
-          <a:prstGeom prst="rect">
-            <a:avLst/>
-          </a:prstGeom>
-          <a:noFill/>
-          <a:extLst>
-            <a:ext uri="{909E8E84-426E-40DD-AFC4-6F175D3DCCD1}">
-              <a14:hiddenFill xmlns:a14="http://schemas.microsoft.com/office/drawing/2010/main">
-                <a:solidFill>
-                  <a:srgbClr val="FFFFFF"/>
-                </a:solidFill>
-              </a14:hiddenFill>
-            </a:ext>
-          </a:extLst>
-        </p:spPr>
-      </p:pic>
-      <p:sp>
-        <p:nvSpPr>
-          <p:cNvPr id="4" name="TextBox 3">
-            <a:extLst>
-              <a:ext uri="{FF2B5EF4-FFF2-40B4-BE49-F238E27FC236}">
-                <a16:creationId xmlns:a16="http://schemas.microsoft.com/office/drawing/2014/main" id="{F91436DE-8FBB-D7A7-C8B9-03AA614D3272}"/>
-              </a:ext>
-            </a:extLst>
-          </p:cNvPr>
-          <p:cNvSpPr txBox="1"/>
-          <p:nvPr/>
-        </p:nvSpPr>
-        <p:spPr>
-          <a:xfrm>
-            <a:off x="7534972" y="3526282"/>
-            <a:ext cx="1904448" cy="307777"/>
-          </a:xfrm>
-          <a:prstGeom prst="rect">
-            <a:avLst/>
-          </a:prstGeom>
-          <a:solidFill>
-            <a:schemeClr val="accent4">
-              <a:lumMod val="20000"/>
-              <a:lumOff val="80000"/>
-            </a:schemeClr>
-          </a:solidFill>
-          <a:ln>
-            <a:solidFill>
-              <a:srgbClr val="FF0000"/>
-            </a:solidFill>
-          </a:ln>
-        </p:spPr>
-        <p:txBody>
-          <a:bodyPr wrap="square" rtlCol="0">
-            <a:spAutoFit/>
-          </a:bodyPr>
-          <a:lstStyle/>
-          <a:p>
-            <a:r>
-              <a:rPr lang="en-US" sz="1400"/>
-              <a:t>Ax (left) vs Maul (right)</a:t>
-            </a:r>
-          </a:p>
-        </p:txBody>
-      </p:sp>
-      <p:pic>
-        <p:nvPicPr>
-          <p:cNvPr id="1030" name="Picture 6" descr="Estwing Carpenters Hatchet | Forestry Suppliers, Inc.">
-            <a:extLst>
-              <a:ext uri="{FF2B5EF4-FFF2-40B4-BE49-F238E27FC236}">
-                <a16:creationId xmlns:a16="http://schemas.microsoft.com/office/drawing/2014/main" id="{A897A808-C87B-560D-1FFB-582384C79DE9}"/>
-              </a:ext>
-            </a:extLst>
-          </p:cNvPr>
-          <p:cNvPicPr>
-            <a:picLocks noChangeAspect="1" noChangeArrowheads="1"/>
-          </p:cNvPicPr>
-          <p:nvPr/>
-        </p:nvPicPr>
-        <p:blipFill rotWithShape="1">
-          <a:blip r:embed="rId4" cstate="email">
-            <a:extLst>
-              <a:ext uri="{28A0092B-C50C-407E-A947-70E740481C1C}">
-                <a14:useLocalDpi xmlns:a14="http://schemas.microsoft.com/office/drawing/2010/main"/>
-              </a:ext>
-            </a:extLst>
-          </a:blip>
-          <a:srcRect/>
-          <a:stretch/>
-        </p:blipFill>
-        <p:spPr bwMode="auto">
-          <a:xfrm>
-            <a:off x="1144211" y="4106517"/>
-            <a:ext cx="1305470" cy="2109541"/>
-          </a:xfrm>
-          <a:prstGeom prst="rect">
-            <a:avLst/>
-          </a:prstGeom>
-          <a:noFill/>
-          <a:extLst>
-            <a:ext uri="{909E8E84-426E-40DD-AFC4-6F175D3DCCD1}">
-              <a14:hiddenFill xmlns:a14="http://schemas.microsoft.com/office/drawing/2010/main">
-                <a:solidFill>
-                  <a:srgbClr val="FFFFFF"/>
-                </a:solidFill>
-              </a14:hiddenFill>
-            </a:ext>
-          </a:extLst>
-        </p:spPr>
-      </p:pic>
-      <p:pic>
-        <p:nvPicPr>
-          <p:cNvPr id="1032" name="Picture 8" descr="Amazon.com : Kings County Tools Indestructible 4-in-1 Box Hatchet | Hatchet,  Hammer, Nail Remover and Pry Bar Multitool | 13-Inch Length, 3-1/2&quot; Blade  Width : Patio, Lawn &amp; Garden">
-            <a:extLst>
-              <a:ext uri="{FF2B5EF4-FFF2-40B4-BE49-F238E27FC236}">
-                <a16:creationId xmlns:a16="http://schemas.microsoft.com/office/drawing/2014/main" id="{4931E2AF-540D-7A9C-619A-051E48312621}"/>
-              </a:ext>
-            </a:extLst>
-          </p:cNvPr>
-          <p:cNvPicPr>
-            <a:picLocks noChangeAspect="1" noChangeArrowheads="1"/>
-          </p:cNvPicPr>
-          <p:nvPr/>
-        </p:nvPicPr>
-        <p:blipFill>
-          <a:blip r:embed="rId5">
-            <a:extLst>
-              <a:ext uri="{28A0092B-C50C-407E-A947-70E740481C1C}">
-                <a14:useLocalDpi xmlns:a14="http://schemas.microsoft.com/office/drawing/2010/main"/>
-              </a:ext>
-            </a:extLst>
-          </a:blip>
-          <a:srcRect/>
-          <a:stretch>
-            <a:fillRect/>
-          </a:stretch>
-        </p:blipFill>
-        <p:spPr bwMode="auto">
-          <a:xfrm>
-            <a:off x="2386720" y="4000290"/>
-            <a:ext cx="2246769" cy="2246769"/>
-          </a:xfrm>
-          <a:prstGeom prst="rect">
-            <a:avLst/>
-          </a:prstGeom>
-          <a:noFill/>
-          <a:extLst>
-            <a:ext uri="{909E8E84-426E-40DD-AFC4-6F175D3DCCD1}">
-              <a14:hiddenFill xmlns:a14="http://schemas.microsoft.com/office/drawing/2010/main">
-                <a:solidFill>
-                  <a:srgbClr val="FFFFFF"/>
-                </a:solidFill>
-              </a14:hiddenFill>
-            </a:ext>
-          </a:extLst>
-        </p:spPr>
-      </p:pic>
-      <p:pic>
-        <p:nvPicPr>
-          <p:cNvPr id="1034" name="Picture 10" descr="10 The Best Backpacking Hatchets &amp; Axes (2021) - Outdoorsr">
-            <a:extLst>
-              <a:ext uri="{FF2B5EF4-FFF2-40B4-BE49-F238E27FC236}">
-                <a16:creationId xmlns:a16="http://schemas.microsoft.com/office/drawing/2014/main" id="{8942C882-9169-BC2D-5FF8-59206E11EC42}"/>
-              </a:ext>
-            </a:extLst>
-          </p:cNvPr>
-          <p:cNvPicPr>
-            <a:picLocks noChangeAspect="1" noChangeArrowheads="1"/>
-          </p:cNvPicPr>
-          <p:nvPr/>
-        </p:nvPicPr>
-        <p:blipFill rotWithShape="1">
-          <a:blip r:embed="rId6" cstate="email">
-            <a:extLst>
-              <a:ext uri="{28A0092B-C50C-407E-A947-70E740481C1C}">
-                <a14:useLocalDpi xmlns:a14="http://schemas.microsoft.com/office/drawing/2010/main"/>
-              </a:ext>
-            </a:extLst>
-          </a:blip>
-          <a:srcRect/>
-          <a:stretch/>
-        </p:blipFill>
-        <p:spPr bwMode="auto">
-          <a:xfrm rot="5400000">
-            <a:off x="-554130" y="4606575"/>
-            <a:ext cx="2246769" cy="937594"/>
-          </a:xfrm>
-          <a:prstGeom prst="rect">
-            <a:avLst/>
-          </a:prstGeom>
-          <a:noFill/>
-          <a:extLst>
-            <a:ext uri="{909E8E84-426E-40DD-AFC4-6F175D3DCCD1}">
-              <a14:hiddenFill xmlns:a14="http://schemas.microsoft.com/office/drawing/2010/main">
-                <a:solidFill>
-                  <a:srgbClr val="FFFFFF"/>
-                </a:solidFill>
-              </a14:hiddenFill>
-            </a:ext>
-          </a:extLst>
-        </p:spPr>
-      </p:pic>
-      <p:sp>
-        <p:nvSpPr>
-          <p:cNvPr id="5" name="TextBox 4">
-            <a:extLst>
-              <a:ext uri="{FF2B5EF4-FFF2-40B4-BE49-F238E27FC236}">
-                <a16:creationId xmlns:a16="http://schemas.microsoft.com/office/drawing/2014/main" id="{C97209AD-5CA8-63DD-9BDF-7F1F12DDA63F}"/>
-              </a:ext>
-            </a:extLst>
-          </p:cNvPr>
-          <p:cNvSpPr txBox="1"/>
-          <p:nvPr/>
-        </p:nvSpPr>
-        <p:spPr>
-          <a:xfrm>
-            <a:off x="100457" y="6438565"/>
-            <a:ext cx="4698448" cy="307777"/>
-          </a:xfrm>
-          <a:prstGeom prst="rect">
-            <a:avLst/>
-          </a:prstGeom>
-          <a:solidFill>
-            <a:schemeClr val="accent4">
-              <a:lumMod val="20000"/>
-              <a:lumOff val="80000"/>
-            </a:schemeClr>
-          </a:solidFill>
-          <a:ln>
-            <a:solidFill>
-              <a:srgbClr val="FF0000"/>
-            </a:solidFill>
-          </a:ln>
-        </p:spPr>
-        <p:txBody>
-          <a:bodyPr wrap="square" rtlCol="0">
-            <a:spAutoFit/>
-          </a:bodyPr>
-          <a:lstStyle/>
-          <a:p>
-            <a:pPr algn="ctr"/>
-            <a:r>
-              <a:rPr lang="en-US" sz="1400"/>
-              <a:t>Hatchets</a:t>
-            </a:r>
-          </a:p>
-        </p:txBody>
-      </p:sp>
-      <p:pic>
-        <p:nvPicPr>
-          <p:cNvPr id="6" name="Picture 5">
-            <a:extLst>
-              <a:ext uri="{FF2B5EF4-FFF2-40B4-BE49-F238E27FC236}">
-                <a16:creationId xmlns:a16="http://schemas.microsoft.com/office/drawing/2014/main" id="{7C7D7A71-AAEF-EB0A-28B5-7EF2B88F2020}"/>
-              </a:ext>
-            </a:extLst>
-          </p:cNvPr>
-          <p:cNvPicPr>
-            <a:picLocks noChangeAspect="1"/>
-          </p:cNvPicPr>
-          <p:nvPr/>
-        </p:nvPicPr>
-        <p:blipFill>
-          <a:blip r:embed="rId7" cstate="email">
-            <a:extLst>
-              <a:ext uri="{28A0092B-C50C-407E-A947-70E740481C1C}">
-                <a14:useLocalDpi xmlns:a14="http://schemas.microsoft.com/office/drawing/2010/main"/>
-              </a:ext>
-            </a:extLst>
-          </a:blip>
-          <a:stretch>
-            <a:fillRect/>
-          </a:stretch>
-        </p:blipFill>
-        <p:spPr>
-          <a:xfrm>
-            <a:off x="10555674" y="1202182"/>
-            <a:ext cx="1257300" cy="4648200"/>
-          </a:xfrm>
-          <a:prstGeom prst="rect">
-            <a:avLst/>
-          </a:prstGeom>
-        </p:spPr>
-      </p:pic>
-      <p:sp>
-        <p:nvSpPr>
-          <p:cNvPr id="7" name="TextBox 6">
-            <a:extLst>
-              <a:ext uri="{FF2B5EF4-FFF2-40B4-BE49-F238E27FC236}">
-                <a16:creationId xmlns:a16="http://schemas.microsoft.com/office/drawing/2014/main" id="{FE8B9781-DEB5-53FD-BF07-712E38FAF340}"/>
-              </a:ext>
-            </a:extLst>
-          </p:cNvPr>
-          <p:cNvSpPr txBox="1"/>
-          <p:nvPr/>
-        </p:nvSpPr>
-        <p:spPr>
-          <a:xfrm>
-            <a:off x="10940546" y="5939282"/>
-            <a:ext cx="872428" cy="307777"/>
-          </a:xfrm>
-          <a:prstGeom prst="rect">
-            <a:avLst/>
-          </a:prstGeom>
-          <a:solidFill>
-            <a:schemeClr val="accent4">
-              <a:lumMod val="20000"/>
-              <a:lumOff val="80000"/>
-            </a:schemeClr>
-          </a:solidFill>
-          <a:ln>
-            <a:solidFill>
-              <a:srgbClr val="FF0000"/>
-            </a:solidFill>
-          </a:ln>
-        </p:spPr>
-        <p:txBody>
-          <a:bodyPr wrap="square" rtlCol="0">
-            <a:spAutoFit/>
-          </a:bodyPr>
-          <a:lstStyle/>
-          <a:p>
-            <a:r>
-              <a:rPr lang="en-US" sz="1400"/>
-              <a:t>Maul Ax</a:t>
-            </a:r>
-          </a:p>
-        </p:txBody>
-      </p:sp>
-      <p:sp>
-        <p:nvSpPr>
-          <p:cNvPr id="8" name="TextBox 7">
-            <a:extLst>
-              <a:ext uri="{FF2B5EF4-FFF2-40B4-BE49-F238E27FC236}">
-                <a16:creationId xmlns:a16="http://schemas.microsoft.com/office/drawing/2014/main" id="{23603549-B578-CE7C-8FED-F9A338540C8B}"/>
-              </a:ext>
-            </a:extLst>
-          </p:cNvPr>
-          <p:cNvSpPr txBox="1"/>
-          <p:nvPr/>
-        </p:nvSpPr>
-        <p:spPr>
-          <a:xfrm>
-            <a:off x="4175993" y="3526282"/>
-            <a:ext cx="1876174" cy="738664"/>
-          </a:xfrm>
-          <a:prstGeom prst="rect">
-            <a:avLst/>
-          </a:prstGeom>
-          <a:solidFill>
-            <a:schemeClr val="accent4">
-              <a:lumMod val="20000"/>
-              <a:lumOff val="80000"/>
-            </a:schemeClr>
-          </a:solidFill>
-          <a:ln>
-            <a:solidFill>
-              <a:srgbClr val="FF0000"/>
-            </a:solidFill>
-          </a:ln>
-        </p:spPr>
-        <p:txBody>
-          <a:bodyPr wrap="square" rtlCol="0">
-            <a:spAutoFit/>
-          </a:bodyPr>
-          <a:lstStyle/>
-          <a:p>
-            <a:pPr algn="ctr"/>
-            <a:r>
-              <a:rPr lang="en-US" sz="1400"/>
-              <a:t>Gransfors Bruk Small Forest Axe 19.5"</a:t>
-            </a:r>
-          </a:p>
-          <a:p>
-            <a:pPr algn="ctr"/>
-            <a:r>
-              <a:rPr lang="en-US" sz="1400"/>
-              <a:t>$175</a:t>
-            </a:r>
+            <a:pPr rtl="0">
+              <a:spcBef>
+                <a:spcPts val="0"/>
+              </a:spcBef>
+              <a:spcAft>
+                <a:spcPts val="0"/>
+              </a:spcAft>
+            </a:pPr>
+            <a:r>
+              <a:rPr lang="en-US" sz="1800" b="0" i="0" u="none" strike="noStrike">
+                <a:solidFill>
+                  <a:srgbClr val="000000"/>
+                </a:solidFill>
+                <a:effectLst/>
+                <a:latin typeface="Arial" panose="020B0604020202020204" pitchFamily="34" charset="0"/>
+              </a:rPr>
+              <a:t>To buy</a:t>
+            </a:r>
+          </a:p>
+          <a:p>
+            <a:pPr rtl="0">
+              <a:spcBef>
+                <a:spcPts val="0"/>
+              </a:spcBef>
+              <a:spcAft>
+                <a:spcPts val="0"/>
+              </a:spcAft>
+            </a:pPr>
+            <a:endParaRPr lang="en-US" sz="1800" b="0" i="0" u="none" strike="noStrike">
+              <a:solidFill>
+                <a:srgbClr val="000000"/>
+              </a:solidFill>
+              <a:effectLst/>
+              <a:latin typeface="Arial" panose="020B0604020202020204" pitchFamily="34" charset="0"/>
+            </a:endParaRPr>
+          </a:p>
+          <a:p>
+            <a:pPr rtl="0">
+              <a:spcBef>
+                <a:spcPts val="0"/>
+              </a:spcBef>
+              <a:spcAft>
+                <a:spcPts val="0"/>
+              </a:spcAft>
+            </a:pPr>
+            <a:r>
+              <a:rPr lang="en-US" sz="1800" b="0" i="0" u="none" strike="noStrike">
+                <a:solidFill>
+                  <a:srgbClr val="000000"/>
+                </a:solidFill>
+                <a:effectLst/>
+                <a:latin typeface="Arial" panose="020B0604020202020204" pitchFamily="34" charset="0"/>
+              </a:rPr>
+              <a:t>12" Nicholson bastard file fine</a:t>
+            </a:r>
+          </a:p>
+          <a:p>
+            <a:r>
+              <a:rPr lang="en-US" sz="1800" b="0" i="0" u="none" strike="noStrike">
+                <a:solidFill>
+                  <a:srgbClr val="000000"/>
+                </a:solidFill>
+                <a:effectLst/>
+                <a:latin typeface="Arial" panose="020B0604020202020204" pitchFamily="34" charset="0"/>
+              </a:rPr>
+              <a:t>12" Nicholson bastard file coarse</a:t>
+            </a:r>
+          </a:p>
+          <a:p>
+            <a:pPr rtl="0">
+              <a:spcBef>
+                <a:spcPts val="0"/>
+              </a:spcBef>
+              <a:spcAft>
+                <a:spcPts val="0"/>
+              </a:spcAft>
+            </a:pPr>
+            <a:endParaRPr lang="en-US" b="0">
+              <a:effectLst/>
+            </a:endParaRPr>
+          </a:p>
+          <a:p>
+            <a:pPr rtl="0">
+              <a:spcBef>
+                <a:spcPts val="0"/>
+              </a:spcBef>
+              <a:spcAft>
+                <a:spcPts val="0"/>
+              </a:spcAft>
+            </a:pPr>
+            <a:r>
+              <a:rPr lang="en-US" sz="1800" b="0" i="0" u="none" strike="noStrike">
+                <a:solidFill>
+                  <a:srgbClr val="000000"/>
+                </a:solidFill>
+                <a:effectLst/>
+                <a:latin typeface="Arial" panose="020B0604020202020204" pitchFamily="34" charset="0"/>
+              </a:rPr>
+              <a:t>plastic handle over the wood</a:t>
+            </a:r>
+            <a:endParaRPr lang="en-US" b="0">
+              <a:effectLst/>
+            </a:endParaRPr>
+          </a:p>
+          <a:p>
+            <a:pPr rtl="0">
+              <a:spcBef>
+                <a:spcPts val="0"/>
+              </a:spcBef>
+              <a:spcAft>
+                <a:spcPts val="0"/>
+              </a:spcAft>
+            </a:pPr>
+            <a:r>
+              <a:rPr lang="en-US" sz="1800" b="0" i="0" u="none" strike="noStrike">
+                <a:solidFill>
+                  <a:srgbClr val="000000"/>
+                </a:solidFill>
+                <a:effectLst/>
+                <a:latin typeface="Arial" panose="020B0604020202020204" pitchFamily="34" charset="0"/>
+              </a:rPr>
+              <a:t>.. https://www.amazon.com/Nicholson-21474U-Universal-Handle/dp/B014IWD3OA/</a:t>
+            </a:r>
+          </a:p>
+          <a:p>
+            <a:pPr rtl="0">
+              <a:spcBef>
+                <a:spcPts val="0"/>
+              </a:spcBef>
+              <a:spcAft>
+                <a:spcPts val="0"/>
+              </a:spcAft>
+            </a:pPr>
+            <a:endParaRPr lang="en-US" sz="1800" b="0" i="0" u="none" strike="noStrike">
+              <a:solidFill>
+                <a:srgbClr val="000000"/>
+              </a:solidFill>
+              <a:effectLst/>
+              <a:latin typeface="Arial" panose="020B0604020202020204" pitchFamily="34" charset="0"/>
+            </a:endParaRPr>
+          </a:p>
+          <a:p>
+            <a:pPr rtl="0">
+              <a:spcBef>
+                <a:spcPts val="0"/>
+              </a:spcBef>
+              <a:spcAft>
+                <a:spcPts val="0"/>
+              </a:spcAft>
+            </a:pPr>
+            <a:r>
+              <a:rPr lang="en-US" sz="1800" b="0" i="0" u="none" strike="noStrike">
+                <a:solidFill>
+                  <a:srgbClr val="000000"/>
+                </a:solidFill>
+                <a:effectLst/>
+                <a:latin typeface="Arial" panose="020B0604020202020204" pitchFamily="34" charset="0"/>
+              </a:rPr>
+              <a:t>Nicholson file card (wire brush to clean the file)</a:t>
+            </a:r>
+          </a:p>
+          <a:p>
+            <a:pPr rtl="0">
+              <a:spcBef>
+                <a:spcPts val="0"/>
+              </a:spcBef>
+              <a:spcAft>
+                <a:spcPts val="0"/>
+              </a:spcAft>
+            </a:pPr>
+            <a:r>
+              <a:rPr lang="en-US" sz="1800" b="0" i="0" u="none" strike="noStrike">
+                <a:solidFill>
+                  <a:srgbClr val="000000"/>
+                </a:solidFill>
+                <a:effectLst/>
+                <a:latin typeface="Arial" panose="020B0604020202020204" pitchFamily="34" charset="0"/>
+              </a:rPr>
+              <a:t>.. </a:t>
+            </a:r>
+            <a:r>
+              <a:rPr lang="en-US" sz="1800" b="0" i="0" u="none" strike="noStrike">
+                <a:solidFill>
+                  <a:srgbClr val="000000"/>
+                </a:solidFill>
+                <a:effectLst/>
+                <a:latin typeface="Arial" panose="020B0604020202020204" pitchFamily="34" charset="0"/>
+                <a:hlinkClick r:id="rId2"/>
+              </a:rPr>
+              <a:t>https://www.amazon.com/Nicholson-File-Card-Brush-Pack/dp/B001KVM2H2/</a:t>
+            </a:r>
+            <a:endParaRPr lang="en-US" sz="1800" b="0" i="0" u="none" strike="noStrike">
+              <a:solidFill>
+                <a:srgbClr val="000000"/>
+              </a:solidFill>
+              <a:effectLst/>
+              <a:latin typeface="Arial" panose="020B0604020202020204" pitchFamily="34" charset="0"/>
+            </a:endParaRPr>
+          </a:p>
+          <a:p>
+            <a:pPr rtl="0">
+              <a:spcBef>
+                <a:spcPts val="0"/>
+              </a:spcBef>
+              <a:spcAft>
+                <a:spcPts val="0"/>
+              </a:spcAft>
+            </a:pPr>
+            <a:endParaRPr lang="en-US">
+              <a:solidFill>
+                <a:srgbClr val="000000"/>
+              </a:solidFill>
+              <a:latin typeface="Arial" panose="020B0604020202020204" pitchFamily="34" charset="0"/>
+            </a:endParaRPr>
+          </a:p>
+          <a:p>
+            <a:r>
+              <a:rPr lang="en-US" b="0" i="0">
+                <a:solidFill>
+                  <a:srgbClr val="0F1111"/>
+                </a:solidFill>
+                <a:effectLst/>
+                <a:latin typeface="Amazon Ember"/>
+              </a:rPr>
+              <a:t>Lansky Sharpeners The Puck Dual Grit Multi Purpose Knife Sharpener 2 Pack</a:t>
+            </a:r>
+            <a:endParaRPr lang="en-US" b="0">
+              <a:solidFill>
+                <a:srgbClr val="000000"/>
+              </a:solidFill>
+              <a:effectLst/>
+              <a:latin typeface="Arial" panose="020B0604020202020204" pitchFamily="34" charset="0"/>
+            </a:endParaRPr>
+          </a:p>
+          <a:p>
+            <a:pPr rtl="0">
+              <a:spcBef>
+                <a:spcPts val="0"/>
+              </a:spcBef>
+              <a:spcAft>
+                <a:spcPts val="0"/>
+              </a:spcAft>
+            </a:pPr>
+            <a:r>
+              <a:rPr lang="en-US" b="0">
+                <a:effectLst/>
+              </a:rPr>
+              <a:t>.. </a:t>
+            </a:r>
+            <a:r>
+              <a:rPr lang="en-US" b="0">
+                <a:effectLst/>
+                <a:hlinkClick r:id="rId3"/>
+              </a:rPr>
+              <a:t>https://www.amazon.com/Lansky-Sharpeners-Multi-Purpose-Sharpener/dp/B017T2GG6I/</a:t>
+            </a:r>
+            <a:endParaRPr lang="en-US" b="0">
+              <a:effectLst/>
+            </a:endParaRPr>
           </a:p>
         </p:txBody>
       </p:sp>
     </p:spTree>
     <p:extLst>
       <p:ext uri="{BB962C8B-B14F-4D97-AF65-F5344CB8AC3E}">
-        <p14:creationId xmlns:p14="http://schemas.microsoft.com/office/powerpoint/2010/main" val="1619744340"/>
+        <p14:creationId xmlns:p14="http://schemas.microsoft.com/office/powerpoint/2010/main" val="3170050163"/>
       </p:ext>
     </p:extLst>
   </p:cSld>
@@ -6784,12 +6946,59 @@
           <a:chExt cx="0" cy="0"/>
         </a:xfrm>
       </p:grpSpPr>
+      <p:pic>
+        <p:nvPicPr>
+          <p:cNvPr id="9" name="Picture 2" descr="Gransfors Bruks Small Forest Axe">
+            <a:extLst>
+              <a:ext uri="{FF2B5EF4-FFF2-40B4-BE49-F238E27FC236}">
+                <a16:creationId xmlns:a16="http://schemas.microsoft.com/office/drawing/2014/main" id="{FB00E50E-FFBA-284A-53BC-3BC03B3D2D30}"/>
+              </a:ext>
+            </a:extLst>
+          </p:cNvPr>
+          <p:cNvPicPr>
+            <a:picLocks noChangeAspect="1" noChangeArrowheads="1"/>
+          </p:cNvPicPr>
+          <p:nvPr/>
+        </p:nvPicPr>
+        <p:blipFill>
+          <a:blip r:embed="rId2" cstate="email">
+            <a:extLst>
+              <a:ext uri="{28A0092B-C50C-407E-A947-70E740481C1C}">
+                <a14:useLocalDpi xmlns:a14="http://schemas.microsoft.com/office/drawing/2010/main"/>
+              </a:ext>
+            </a:extLst>
+          </a:blip>
+          <a:srcRect/>
+          <a:stretch>
+            <a:fillRect/>
+          </a:stretch>
+        </p:blipFill>
+        <p:spPr bwMode="auto">
+          <a:xfrm>
+            <a:off x="4068231" y="1501320"/>
+            <a:ext cx="3045241" cy="3045241"/>
+          </a:xfrm>
+          <a:prstGeom prst="rect">
+            <a:avLst/>
+          </a:prstGeom>
+          <a:noFill/>
+          <a:extLst>
+            <a:ext uri="{909E8E84-426E-40DD-AFC4-6F175D3DCCD1}">
+              <a14:hiddenFill xmlns:a14="http://schemas.microsoft.com/office/drawing/2010/main">
+                <a:solidFill>
+                  <a:srgbClr val="FFFFFF"/>
+                </a:solidFill>
+              </a14:hiddenFill>
+            </a:ext>
+          </a:extLst>
+        </p:spPr>
+      </p:pic>
       <p:sp>
         <p:nvSpPr>
           <p:cNvPr id="2" name="TextBox 1">
             <a:extLst>
               <a:ext uri="{FF2B5EF4-FFF2-40B4-BE49-F238E27FC236}">
-                <a16:creationId xmlns:a16="http://schemas.microsoft.com/office/drawing/2014/main" id="{520D4253-2ED8-0EB9-1C23-7F80EC3B9CD6}"/>
+                <a16:creationId xmlns:a16="http://schemas.microsoft.com/office/drawing/2014/main" id="{5F93A89F-48F8-F097-8A70-8C56B8D7826A}"/>
               </a:ext>
             </a:extLst>
           </p:cNvPr>
@@ -6798,8 +7007,8 @@
         </p:nvSpPr>
         <p:spPr>
           <a:xfrm>
-            <a:off x="119269" y="705678"/>
-            <a:ext cx="4823792" cy="1384995"/>
+            <a:off x="229152" y="335746"/>
+            <a:ext cx="4698447" cy="954107"/>
           </a:xfrm>
           <a:prstGeom prst="rect">
             <a:avLst/>
@@ -6823,18 +7032,27 @@
           <a:lstStyle/>
           <a:p>
             <a:r>
-              <a:rPr lang="ru-RU" sz="1400"/>
-              <a:t>Па́ста ГОИ (от ГОИ — Государственный оптический институт) — шлифовальные и полировальные пасты на основе оксида хрома</a:t>
-            </a:r>
-            <a:r>
               <a:rPr lang="en-US" sz="1400"/>
-              <a:t>, </a:t>
-            </a:r>
-            <a:r>
-              <a:rPr lang="ru-RU" sz="1400"/>
-              <a:t>используемые для шлифования и полирования стальных сплавов, цветных металлов, твёрдых пластмасс и полимеров, стёкол, оптических стёкол, керамических материалов.</a:t>
-            </a:r>
-            <a:endParaRPr lang="en-US" sz="1400"/>
+              <a:t>Ax – American English</a:t>
+            </a:r>
+          </a:p>
+          <a:p>
+            <a:r>
+              <a:rPr lang="en-US" sz="1400"/>
+              <a:t>Axe – British English</a:t>
+            </a:r>
+          </a:p>
+          <a:p>
+            <a:r>
+              <a:rPr lang="en-US" sz="1400"/>
+              <a:t>Hatchet – small ax (carpenter's hatchet or camper hatchet)</a:t>
+            </a:r>
+          </a:p>
+          <a:p>
+            <a:r>
+              <a:rPr lang="en-US" sz="1400"/>
+              <a:t>Maul – long-handled ax for splitting wood</a:t>
+            </a:r>
           </a:p>
         </p:txBody>
       </p:sp>
@@ -6843,7 +7061,7 @@
           <p:cNvPr id="3" name="TextBox 2">
             <a:extLst>
               <a:ext uri="{FF2B5EF4-FFF2-40B4-BE49-F238E27FC236}">
-                <a16:creationId xmlns:a16="http://schemas.microsoft.com/office/drawing/2014/main" id="{027EFAC2-91F2-94C5-4A95-1C3A54E229A8}"/>
+                <a16:creationId xmlns:a16="http://schemas.microsoft.com/office/drawing/2014/main" id="{2676F06D-C960-8F25-137E-32AD61786E53}"/>
               </a:ext>
             </a:extLst>
           </p:cNvPr>
@@ -6852,13 +7070,119 @@
         </p:nvSpPr>
         <p:spPr>
           <a:xfrm>
-            <a:off x="49695" y="69574"/>
-            <a:ext cx="1888435" cy="523220"/>
+            <a:off x="7534972" y="4106517"/>
+            <a:ext cx="2475947" cy="2246769"/>
+          </a:xfrm>
+          <a:prstGeom prst="rect">
+            <a:avLst/>
+          </a:prstGeom>
+          <a:solidFill>
+            <a:schemeClr val="accent4">
+              <a:lumMod val="20000"/>
+              <a:lumOff val="80000"/>
+            </a:schemeClr>
+          </a:solidFill>
+          <a:ln>
+            <a:solidFill>
+              <a:srgbClr val="FF0000"/>
+            </a:solidFill>
+          </a:ln>
+        </p:spPr>
+        <p:txBody>
+          <a:bodyPr wrap="square" rtlCol="0">
+            <a:spAutoFit/>
+          </a:bodyPr>
+          <a:lstStyle/>
+          <a:p>
+            <a:r>
+              <a:rPr lang="en-US" sz="1400"/>
+              <a:t>Maul Ax</a:t>
+            </a:r>
+          </a:p>
+          <a:p>
+            <a:r>
+              <a:rPr lang="en-US" sz="1400"/>
+              <a:t>A splitting maul also known as a block buster, block splitter, chop and maul, sledge axe, go-devil or hamaxe is a heavy, long-handled axe used for splitting a piece of wood along its grain. One side of its head is like a sledgehammer, and the other side is like an axe.</a:t>
+            </a:r>
+          </a:p>
+        </p:txBody>
+      </p:sp>
+      <p:pic>
+        <p:nvPicPr>
+          <p:cNvPr id="1026" name="Picture 2" descr="Maul vs. Axe | Autumn 2006 | Knots and Bolts">
+            <a:extLst>
+              <a:ext uri="{FF2B5EF4-FFF2-40B4-BE49-F238E27FC236}">
+                <a16:creationId xmlns:a16="http://schemas.microsoft.com/office/drawing/2014/main" id="{2004517B-E375-E065-AE1E-1DEBCB882222}"/>
+              </a:ext>
+            </a:extLst>
+          </p:cNvPr>
+          <p:cNvPicPr>
+            <a:picLocks noChangeAspect="1" noChangeArrowheads="1"/>
+          </p:cNvPicPr>
+          <p:nvPr/>
+        </p:nvPicPr>
+        <p:blipFill rotWithShape="1">
+          <a:blip r:embed="rId3" cstate="email">
+            <a:extLst>
+              <a:ext uri="{28A0092B-C50C-407E-A947-70E740481C1C}">
+                <a14:useLocalDpi xmlns:a14="http://schemas.microsoft.com/office/drawing/2010/main"/>
+              </a:ext>
+            </a:extLst>
+          </a:blip>
+          <a:srcRect/>
+          <a:stretch/>
+        </p:blipFill>
+        <p:spPr bwMode="auto">
+          <a:xfrm>
+            <a:off x="7346954" y="829819"/>
+            <a:ext cx="3045241" cy="2527300"/>
           </a:xfrm>
           <a:prstGeom prst="rect">
             <a:avLst/>
           </a:prstGeom>
           <a:noFill/>
+          <a:extLst>
+            <a:ext uri="{909E8E84-426E-40DD-AFC4-6F175D3DCCD1}">
+              <a14:hiddenFill xmlns:a14="http://schemas.microsoft.com/office/drawing/2010/main">
+                <a:solidFill>
+                  <a:srgbClr val="FFFFFF"/>
+                </a:solidFill>
+              </a14:hiddenFill>
+            </a:ext>
+          </a:extLst>
+        </p:spPr>
+      </p:pic>
+      <p:sp>
+        <p:nvSpPr>
+          <p:cNvPr id="4" name="TextBox 3">
+            <a:extLst>
+              <a:ext uri="{FF2B5EF4-FFF2-40B4-BE49-F238E27FC236}">
+                <a16:creationId xmlns:a16="http://schemas.microsoft.com/office/drawing/2014/main" id="{F91436DE-8FBB-D7A7-C8B9-03AA614D3272}"/>
+              </a:ext>
+            </a:extLst>
+          </p:cNvPr>
+          <p:cNvSpPr txBox="1"/>
+          <p:nvPr/>
+        </p:nvSpPr>
+        <p:spPr>
+          <a:xfrm>
+            <a:off x="7534972" y="3526282"/>
+            <a:ext cx="1904448" cy="307777"/>
+          </a:xfrm>
+          <a:prstGeom prst="rect">
+            <a:avLst/>
+          </a:prstGeom>
+          <a:solidFill>
+            <a:schemeClr val="accent4">
+              <a:lumMod val="20000"/>
+              <a:lumOff val="80000"/>
+            </a:schemeClr>
+          </a:solidFill>
+          <a:ln>
+            <a:solidFill>
+              <a:srgbClr val="FF0000"/>
+            </a:solidFill>
+          </a:ln>
         </p:spPr>
         <p:txBody>
           <a:bodyPr wrap="square" rtlCol="0">
@@ -6867,19 +7191,63 @@
           <a:lstStyle/>
           <a:p>
             <a:r>
-              <a:rPr lang="ru-RU" sz="2800" b="1"/>
-              <a:t>Па́ста ГОИ</a:t>
-            </a:r>
-            <a:endParaRPr lang="en-US" sz="2800" b="1"/>
+              <a:rPr lang="en-US" sz="1400"/>
+              <a:t>Ax (left) vs Maul (right)</a:t>
+            </a:r>
           </a:p>
         </p:txBody>
       </p:sp>
       <p:pic>
         <p:nvPicPr>
-          <p:cNvPr id="1026" name="Picture 2">
-            <a:extLst>
-              <a:ext uri="{FF2B5EF4-FFF2-40B4-BE49-F238E27FC236}">
-                <a16:creationId xmlns:a16="http://schemas.microsoft.com/office/drawing/2014/main" id="{52A9AA8E-0192-5387-6900-2162B5872002}"/>
+          <p:cNvPr id="1030" name="Picture 6" descr="Estwing Carpenters Hatchet | Forestry Suppliers, Inc.">
+            <a:extLst>
+              <a:ext uri="{FF2B5EF4-FFF2-40B4-BE49-F238E27FC236}">
+                <a16:creationId xmlns:a16="http://schemas.microsoft.com/office/drawing/2014/main" id="{A897A808-C87B-560D-1FFB-582384C79DE9}"/>
+              </a:ext>
+            </a:extLst>
+          </p:cNvPr>
+          <p:cNvPicPr>
+            <a:picLocks noChangeAspect="1" noChangeArrowheads="1"/>
+          </p:cNvPicPr>
+          <p:nvPr/>
+        </p:nvPicPr>
+        <p:blipFill rotWithShape="1">
+          <a:blip r:embed="rId4" cstate="email">
+            <a:extLst>
+              <a:ext uri="{28A0092B-C50C-407E-A947-70E740481C1C}">
+                <a14:useLocalDpi xmlns:a14="http://schemas.microsoft.com/office/drawing/2010/main"/>
+              </a:ext>
+            </a:extLst>
+          </a:blip>
+          <a:srcRect/>
+          <a:stretch/>
+        </p:blipFill>
+        <p:spPr bwMode="auto">
+          <a:xfrm>
+            <a:off x="1144211" y="4106517"/>
+            <a:ext cx="1305470" cy="2109541"/>
+          </a:xfrm>
+          <a:prstGeom prst="rect">
+            <a:avLst/>
+          </a:prstGeom>
+          <a:noFill/>
+          <a:extLst>
+            <a:ext uri="{909E8E84-426E-40DD-AFC4-6F175D3DCCD1}">
+              <a14:hiddenFill xmlns:a14="http://schemas.microsoft.com/office/drawing/2010/main">
+                <a:solidFill>
+                  <a:srgbClr val="FFFFFF"/>
+                </a:solidFill>
+              </a14:hiddenFill>
+            </a:ext>
+          </a:extLst>
+        </p:spPr>
+      </p:pic>
+      <p:pic>
+        <p:nvPicPr>
+          <p:cNvPr id="1032" name="Picture 8" descr="Amazon.com : Kings County Tools Indestructible 4-in-1 Box Hatchet | Hatchet,  Hammer, Nail Remover and Pry Bar Multitool | 13-Inch Length, 3-1/2&quot; Blade  Width : Patio, Lawn &amp; Garden">
+            <a:extLst>
+              <a:ext uri="{FF2B5EF4-FFF2-40B4-BE49-F238E27FC236}">
+                <a16:creationId xmlns:a16="http://schemas.microsoft.com/office/drawing/2014/main" id="{4931E2AF-540D-7A9C-619A-051E48312621}"/>
               </a:ext>
             </a:extLst>
           </p:cNvPr>
@@ -6889,7 +7257,7 @@
           <p:nvPr/>
         </p:nvPicPr>
         <p:blipFill>
-          <a:blip r:embed="rId2" cstate="email">
+          <a:blip r:embed="rId5">
             <a:extLst>
               <a:ext uri="{28A0092B-C50C-407E-A947-70E740481C1C}">
                 <a14:useLocalDpi xmlns:a14="http://schemas.microsoft.com/office/drawing/2010/main"/>
@@ -6903,8 +7271,8 @@
         </p:blipFill>
         <p:spPr bwMode="auto">
           <a:xfrm>
-            <a:off x="6096000" y="350377"/>
-            <a:ext cx="2421176" cy="1815882"/>
+            <a:off x="2386720" y="4000290"/>
+            <a:ext cx="2246769" cy="2246769"/>
           </a:xfrm>
           <a:prstGeom prst="rect">
             <a:avLst/>
@@ -6921,27 +7289,82 @@
           </a:extLst>
         </p:spPr>
       </p:pic>
-      <p:sp>
-        <p:nvSpPr>
-          <p:cNvPr id="4" name="TextBox 3">
-            <a:extLst>
-              <a:ext uri="{FF2B5EF4-FFF2-40B4-BE49-F238E27FC236}">
-                <a16:creationId xmlns:a16="http://schemas.microsoft.com/office/drawing/2014/main" id="{25E1BB97-1967-4A2B-90E4-0EA23F9B338C}"/>
-              </a:ext>
-            </a:extLst>
-          </p:cNvPr>
-          <p:cNvSpPr txBox="1"/>
+      <p:pic>
+        <p:nvPicPr>
+          <p:cNvPr id="1034" name="Picture 10" descr="10 The Best Backpacking Hatchets &amp; Axes (2021) - Outdoorsr">
+            <a:extLst>
+              <a:ext uri="{FF2B5EF4-FFF2-40B4-BE49-F238E27FC236}">
+                <a16:creationId xmlns:a16="http://schemas.microsoft.com/office/drawing/2014/main" id="{8942C882-9169-BC2D-5FF8-59206E11EC42}"/>
+              </a:ext>
+            </a:extLst>
+          </p:cNvPr>
+          <p:cNvPicPr>
+            <a:picLocks noChangeAspect="1" noChangeArrowheads="1"/>
+          </p:cNvPicPr>
           <p:nvPr/>
-        </p:nvSpPr>
-        <p:spPr>
-          <a:xfrm>
-            <a:off x="6378935" y="2166259"/>
-            <a:ext cx="1855305" cy="369332"/>
+        </p:nvPicPr>
+        <p:blipFill rotWithShape="1">
+          <a:blip r:embed="rId6" cstate="email">
+            <a:extLst>
+              <a:ext uri="{28A0092B-C50C-407E-A947-70E740481C1C}">
+                <a14:useLocalDpi xmlns:a14="http://schemas.microsoft.com/office/drawing/2010/main"/>
+              </a:ext>
+            </a:extLst>
+          </a:blip>
+          <a:srcRect/>
+          <a:stretch/>
+        </p:blipFill>
+        <p:spPr bwMode="auto">
+          <a:xfrm rot="5400000">
+            <a:off x="-554130" y="4606575"/>
+            <a:ext cx="2246769" cy="937594"/>
           </a:xfrm>
           <a:prstGeom prst="rect">
             <a:avLst/>
           </a:prstGeom>
           <a:noFill/>
+          <a:extLst>
+            <a:ext uri="{909E8E84-426E-40DD-AFC4-6F175D3DCCD1}">
+              <a14:hiddenFill xmlns:a14="http://schemas.microsoft.com/office/drawing/2010/main">
+                <a:solidFill>
+                  <a:srgbClr val="FFFFFF"/>
+                </a:solidFill>
+              </a14:hiddenFill>
+            </a:ext>
+          </a:extLst>
+        </p:spPr>
+      </p:pic>
+      <p:sp>
+        <p:nvSpPr>
+          <p:cNvPr id="5" name="TextBox 4">
+            <a:extLst>
+              <a:ext uri="{FF2B5EF4-FFF2-40B4-BE49-F238E27FC236}">
+                <a16:creationId xmlns:a16="http://schemas.microsoft.com/office/drawing/2014/main" id="{C97209AD-5CA8-63DD-9BDF-7F1F12DDA63F}"/>
+              </a:ext>
+            </a:extLst>
+          </p:cNvPr>
+          <p:cNvSpPr txBox="1"/>
+          <p:nvPr/>
+        </p:nvSpPr>
+        <p:spPr>
+          <a:xfrm>
+            <a:off x="100457" y="6438565"/>
+            <a:ext cx="4698448" cy="307777"/>
+          </a:xfrm>
+          <a:prstGeom prst="rect">
+            <a:avLst/>
+          </a:prstGeom>
+          <a:solidFill>
+            <a:schemeClr val="accent4">
+              <a:lumMod val="20000"/>
+              <a:lumOff val="80000"/>
+            </a:schemeClr>
+          </a:solidFill>
+          <a:ln>
+            <a:solidFill>
+              <a:srgbClr val="FF0000"/>
+            </a:solidFill>
+          </a:ln>
         </p:spPr>
         <p:txBody>
           <a:bodyPr wrap="square" rtlCol="0">
@@ -6949,35 +7372,81 @@
           </a:bodyPr>
           <a:lstStyle/>
           <a:p>
-            <a:r>
-              <a:rPr lang="ru-RU"/>
-              <a:t>Кусок пасты ГОИ</a:t>
-            </a:r>
-            <a:endParaRPr lang="en-US"/>
-          </a:p>
-        </p:txBody>
-      </p:sp>
-      <p:sp>
-        <p:nvSpPr>
-          <p:cNvPr id="5" name="TextBox 4">
-            <a:extLst>
-              <a:ext uri="{FF2B5EF4-FFF2-40B4-BE49-F238E27FC236}">
-                <a16:creationId xmlns:a16="http://schemas.microsoft.com/office/drawing/2014/main" id="{578348FC-CB01-20A8-208D-968A291B1030}"/>
-              </a:ext>
-            </a:extLst>
-          </p:cNvPr>
-          <p:cNvSpPr txBox="1"/>
+            <a:pPr algn="ctr"/>
+            <a:r>
+              <a:rPr lang="en-US" sz="1400"/>
+              <a:t>Hatchets</a:t>
+            </a:r>
+          </a:p>
+        </p:txBody>
+      </p:sp>
+      <p:pic>
+        <p:nvPicPr>
+          <p:cNvPr id="6" name="Picture 5">
+            <a:extLst>
+              <a:ext uri="{FF2B5EF4-FFF2-40B4-BE49-F238E27FC236}">
+                <a16:creationId xmlns:a16="http://schemas.microsoft.com/office/drawing/2014/main" id="{7C7D7A71-AAEF-EB0A-28B5-7EF2B88F2020}"/>
+              </a:ext>
+            </a:extLst>
+          </p:cNvPr>
+          <p:cNvPicPr>
+            <a:picLocks noChangeAspect="1"/>
+          </p:cNvPicPr>
           <p:nvPr/>
-        </p:nvSpPr>
-        <p:spPr>
-          <a:xfrm>
-            <a:off x="119269" y="2782669"/>
-            <a:ext cx="4558748" cy="646331"/>
+        </p:nvPicPr>
+        <p:blipFill>
+          <a:blip r:embed="rId7" cstate="email">
+            <a:extLst>
+              <a:ext uri="{28A0092B-C50C-407E-A947-70E740481C1C}">
+                <a14:useLocalDpi xmlns:a14="http://schemas.microsoft.com/office/drawing/2010/main"/>
+              </a:ext>
+            </a:extLst>
+          </a:blip>
+          <a:stretch>
+            <a:fillRect/>
+          </a:stretch>
+        </p:blipFill>
+        <p:spPr>
+          <a:xfrm>
+            <a:off x="10555674" y="1202182"/>
+            <a:ext cx="1257300" cy="4648200"/>
           </a:xfrm>
           <a:prstGeom prst="rect">
             <a:avLst/>
           </a:prstGeom>
-          <a:noFill/>
+        </p:spPr>
+      </p:pic>
+      <p:sp>
+        <p:nvSpPr>
+          <p:cNvPr id="7" name="TextBox 6">
+            <a:extLst>
+              <a:ext uri="{FF2B5EF4-FFF2-40B4-BE49-F238E27FC236}">
+                <a16:creationId xmlns:a16="http://schemas.microsoft.com/office/drawing/2014/main" id="{FE8B9781-DEB5-53FD-BF07-712E38FAF340}"/>
+              </a:ext>
+            </a:extLst>
+          </p:cNvPr>
+          <p:cNvSpPr txBox="1"/>
+          <p:nvPr/>
+        </p:nvSpPr>
+        <p:spPr>
+          <a:xfrm>
+            <a:off x="10940546" y="5939282"/>
+            <a:ext cx="872428" cy="307777"/>
+          </a:xfrm>
+          <a:prstGeom prst="rect">
+            <a:avLst/>
+          </a:prstGeom>
+          <a:solidFill>
+            <a:schemeClr val="accent4">
+              <a:lumMod val="20000"/>
+              <a:lumOff val="80000"/>
+            </a:schemeClr>
+          </a:solidFill>
+          <a:ln>
+            <a:solidFill>
+              <a:srgbClr val="FF0000"/>
+            </a:solidFill>
+          </a:ln>
         </p:spPr>
         <p:txBody>
           <a:bodyPr wrap="square" rtlCol="0">
@@ -6986,18 +7455,18 @@
           <a:lstStyle/>
           <a:p>
             <a:r>
-              <a:rPr lang="en-US"/>
-              <a:t>There are multiple honing and polishing pastes and compounds on amazon</a:t>
-            </a:r>
-          </a:p>
-        </p:txBody>
-      </p:sp>
-      <p:sp>
-        <p:nvSpPr>
-          <p:cNvPr id="6" name="TextBox 5">
-            <a:extLst>
-              <a:ext uri="{FF2B5EF4-FFF2-40B4-BE49-F238E27FC236}">
-                <a16:creationId xmlns:a16="http://schemas.microsoft.com/office/drawing/2014/main" id="{43739B9B-E3BC-F4A8-10A9-860BFA040DA2}"/>
+              <a:rPr lang="en-US" sz="1400"/>
+              <a:t>Maul Ax</a:t>
+            </a:r>
+          </a:p>
+        </p:txBody>
+      </p:sp>
+      <p:sp>
+        <p:nvSpPr>
+          <p:cNvPr id="8" name="TextBox 7">
+            <a:extLst>
+              <a:ext uri="{FF2B5EF4-FFF2-40B4-BE49-F238E27FC236}">
+                <a16:creationId xmlns:a16="http://schemas.microsoft.com/office/drawing/2014/main" id="{23603549-B578-CE7C-8FED-F9A338540C8B}"/>
               </a:ext>
             </a:extLst>
           </p:cNvPr>
@@ -7006,13 +7475,23 @@
         </p:nvSpPr>
         <p:spPr>
           <a:xfrm>
-            <a:off x="301485" y="3650124"/>
-            <a:ext cx="3650975" cy="2677656"/>
+            <a:off x="4175993" y="3526282"/>
+            <a:ext cx="1876174" cy="738664"/>
           </a:xfrm>
           <a:prstGeom prst="rect">
             <a:avLst/>
           </a:prstGeom>
-          <a:noFill/>
+          <a:solidFill>
+            <a:schemeClr val="accent4">
+              <a:lumMod val="20000"/>
+              <a:lumOff val="80000"/>
+            </a:schemeClr>
+          </a:solidFill>
+          <a:ln>
+            <a:solidFill>
+              <a:srgbClr val="FF0000"/>
+            </a:solidFill>
+          </a:ln>
         </p:spPr>
         <p:txBody>
           <a:bodyPr wrap="square" rtlCol="0">
@@ -7020,266 +7499,17 @@
           </a:bodyPr>
           <a:lstStyle/>
           <a:p>
+            <a:pPr algn="ctr"/>
             <a:r>
               <a:rPr lang="en-US" sz="1400"/>
-              <a:t>The larger the "Grit" number – the smaller the size of particles. But be careful, becasue there are different Grit scales:</a:t>
-            </a:r>
-          </a:p>
-          <a:p>
+              <a:t>Gransfors Bruk Small Forest Axe 19.5"</a:t>
+            </a:r>
+          </a:p>
+          <a:p>
+            <a:pPr algn="ctr"/>
             <a:r>
               <a:rPr lang="en-US" sz="1400"/>
-              <a:t> FEPA (Europe) and ANSI/Cami (US) </a:t>
-            </a:r>
-          </a:p>
-          <a:p>
-            <a:endParaRPr lang="en-US" sz="1400"/>
-          </a:p>
-          <a:p>
-            <a:r>
-              <a:rPr lang="en-US" sz="1400"/>
-              <a:t>The European </a:t>
-            </a:r>
-          </a:p>
-          <a:p>
-            <a:r>
-              <a:rPr lang="en-US" sz="1400"/>
-              <a:t>  P2000 - 10 microns</a:t>
-            </a:r>
-          </a:p>
-          <a:p>
-            <a:r>
-              <a:rPr lang="en-US" sz="1400"/>
-              <a:t>  P4000 -  5 microns</a:t>
-            </a:r>
-          </a:p>
-          <a:p>
-            <a:r>
-              <a:rPr lang="en-US" sz="1400"/>
-              <a:t>US:</a:t>
-            </a:r>
-          </a:p>
-          <a:p>
-            <a:r>
-              <a:rPr lang="en-US" sz="1400"/>
-              <a:t>    800 - 12.2 microns</a:t>
-            </a:r>
-          </a:p>
-          <a:p>
-            <a:r>
-              <a:rPr lang="en-US" sz="1400"/>
-              <a:t>   1000 -  9.2 microns</a:t>
-            </a:r>
-          </a:p>
-          <a:p>
-            <a:r>
-              <a:rPr lang="en-US" sz="1400"/>
-              <a:t>   1200 -  6.5 microns</a:t>
-            </a:r>
-          </a:p>
-        </p:txBody>
-      </p:sp>
-      <p:sp>
-        <p:nvSpPr>
-          <p:cNvPr id="7" name="TextBox 6">
-            <a:extLst>
-              <a:ext uri="{FF2B5EF4-FFF2-40B4-BE49-F238E27FC236}">
-                <a16:creationId xmlns:a16="http://schemas.microsoft.com/office/drawing/2014/main" id="{C0AF3F8C-B8C7-C277-3B95-67E3DD9F3599}"/>
-              </a:ext>
-            </a:extLst>
-          </p:cNvPr>
-          <p:cNvSpPr txBox="1"/>
-          <p:nvPr/>
-        </p:nvSpPr>
-        <p:spPr>
-          <a:xfrm>
-            <a:off x="8680174" y="350377"/>
-            <a:ext cx="3392557" cy="1815882"/>
-          </a:xfrm>
-          <a:prstGeom prst="rect">
-            <a:avLst/>
-          </a:prstGeom>
-          <a:noFill/>
-        </p:spPr>
-        <p:txBody>
-          <a:bodyPr wrap="square" rtlCol="0">
-            <a:spAutoFit/>
-          </a:bodyPr>
-          <a:lstStyle/>
-          <a:p>
-            <a:r>
-              <a:rPr lang="en-US" sz="1400" i="0">
-                <a:solidFill>
-                  <a:srgbClr val="000000"/>
-                </a:solidFill>
-                <a:effectLst/>
-                <a:latin typeface="inherit"/>
-              </a:rPr>
-              <a:t>Composition: </a:t>
-            </a:r>
-          </a:p>
-          <a:p>
-            <a:pPr marL="285750" indent="-285750">
-              <a:buFont typeface="Arial" panose="020B0604020202020204" pitchFamily="34" charset="0"/>
-              <a:buChar char="•"/>
-            </a:pPr>
-            <a:r>
-              <a:rPr lang="en-US" sz="1400" i="0">
-                <a:solidFill>
-                  <a:srgbClr val="000000"/>
-                </a:solidFill>
-                <a:effectLst/>
-                <a:latin typeface="inherit"/>
-              </a:rPr>
-              <a:t>65-74 parts of trivalent chromium oxide, </a:t>
-            </a:r>
-          </a:p>
-          <a:p>
-            <a:pPr marL="285750" indent="-285750">
-              <a:buFont typeface="Arial" panose="020B0604020202020204" pitchFamily="34" charset="0"/>
-              <a:buChar char="•"/>
-            </a:pPr>
-            <a:r>
-              <a:rPr lang="en-US" sz="1400" i="0">
-                <a:solidFill>
-                  <a:srgbClr val="000000"/>
-                </a:solidFill>
-                <a:effectLst/>
-                <a:latin typeface="inherit"/>
-              </a:rPr>
-              <a:t>1-silica gel, </a:t>
-            </a:r>
-          </a:p>
-          <a:p>
-            <a:pPr marL="285750" indent="-285750">
-              <a:buFont typeface="Arial" panose="020B0604020202020204" pitchFamily="34" charset="0"/>
-              <a:buChar char="•"/>
-            </a:pPr>
-            <a:r>
-              <a:rPr lang="en-US" sz="1400" i="0">
-                <a:solidFill>
-                  <a:srgbClr val="000000"/>
-                </a:solidFill>
-                <a:effectLst/>
-                <a:latin typeface="inherit"/>
-              </a:rPr>
-              <a:t>10-stearin, </a:t>
-            </a:r>
-          </a:p>
-          <a:p>
-            <a:pPr marL="285750" indent="-285750">
-              <a:buFont typeface="Arial" panose="020B0604020202020204" pitchFamily="34" charset="0"/>
-              <a:buChar char="•"/>
-            </a:pPr>
-            <a:r>
-              <a:rPr lang="en-US" sz="1400" i="0">
-                <a:solidFill>
-                  <a:srgbClr val="000000"/>
-                </a:solidFill>
-                <a:effectLst/>
-                <a:latin typeface="inherit"/>
-              </a:rPr>
-              <a:t>10 — split fat, </a:t>
-            </a:r>
-          </a:p>
-          <a:p>
-            <a:pPr marL="285750" indent="-285750">
-              <a:buFont typeface="Arial" panose="020B0604020202020204" pitchFamily="34" charset="0"/>
-              <a:buChar char="•"/>
-            </a:pPr>
-            <a:r>
-              <a:rPr lang="en-US" sz="1400" i="0">
-                <a:solidFill>
-                  <a:srgbClr val="000000"/>
-                </a:solidFill>
-                <a:effectLst/>
-                <a:latin typeface="inherit"/>
-              </a:rPr>
-              <a:t>2-kerosene, </a:t>
-            </a:r>
-          </a:p>
-          <a:p>
-            <a:pPr marL="285750" indent="-285750">
-              <a:buFont typeface="Arial" panose="020B0604020202020204" pitchFamily="34" charset="0"/>
-              <a:buChar char="•"/>
-            </a:pPr>
-            <a:r>
-              <a:rPr lang="en-US" sz="1400" i="0">
-                <a:solidFill>
-                  <a:srgbClr val="000000"/>
-                </a:solidFill>
-                <a:effectLst/>
-                <a:latin typeface="inherit"/>
-              </a:rPr>
-              <a:t>2-oleic acid, </a:t>
-            </a:r>
-          </a:p>
-          <a:p>
-            <a:pPr marL="285750" indent="-285750">
-              <a:buFont typeface="Arial" panose="020B0604020202020204" pitchFamily="34" charset="0"/>
-              <a:buChar char="•"/>
-            </a:pPr>
-            <a:r>
-              <a:rPr lang="en-US" sz="1400" i="0">
-                <a:solidFill>
-                  <a:srgbClr val="000000"/>
-                </a:solidFill>
-                <a:effectLst/>
-                <a:latin typeface="inherit"/>
-              </a:rPr>
-              <a:t>0.2-bicarbonate of soda.</a:t>
-            </a:r>
-          </a:p>
-        </p:txBody>
-      </p:sp>
-      <p:sp>
-        <p:nvSpPr>
-          <p:cNvPr id="8" name="TextBox 7">
-            <a:extLst>
-              <a:ext uri="{FF2B5EF4-FFF2-40B4-BE49-F238E27FC236}">
-                <a16:creationId xmlns:a16="http://schemas.microsoft.com/office/drawing/2014/main" id="{93C94344-85F7-9B8D-D19A-9EDAB7855819}"/>
-              </a:ext>
-            </a:extLst>
-          </p:cNvPr>
-          <p:cNvSpPr txBox="1"/>
-          <p:nvPr/>
-        </p:nvSpPr>
-        <p:spPr>
-          <a:xfrm>
-            <a:off x="6095999" y="2782669"/>
-            <a:ext cx="5473149" cy="954107"/>
-          </a:xfrm>
-          <a:prstGeom prst="rect">
-            <a:avLst/>
-          </a:prstGeom>
-          <a:noFill/>
-        </p:spPr>
-        <p:txBody>
-          <a:bodyPr wrap="square" rtlCol="0">
-            <a:spAutoFit/>
-          </a:bodyPr>
-          <a:lstStyle/>
-          <a:p>
-            <a:r>
-              <a:rPr lang="en-US" sz="1400"/>
-              <a:t>No. 1 – Black paste with a green hue, with a grain size of 0.3-0.1 microns.</a:t>
-            </a:r>
-          </a:p>
-          <a:p>
-            <a:r>
-              <a:rPr lang="en-US" sz="1400"/>
-              <a:t>No. 2 - Dark green paste, with a grain size of 7-1 microns.</a:t>
-            </a:r>
-          </a:p>
-          <a:p>
-            <a:r>
-              <a:rPr lang="en-US" sz="1400"/>
-              <a:t>No. 3 - Green paste, with a grain size of 17-8 microns.</a:t>
-            </a:r>
-          </a:p>
-          <a:p>
-            <a:r>
-              <a:rPr lang="en-US" sz="1400"/>
-              <a:t>No. 4 - Light green paste, with a grain size of 40-18 microns. </a:t>
+              <a:t>$175</a:t>
             </a:r>
           </a:p>
         </p:txBody>
@@ -7287,7 +7517,7 @@
     </p:spTree>
     <p:extLst>
       <p:ext uri="{BB962C8B-B14F-4D97-AF65-F5344CB8AC3E}">
-        <p14:creationId xmlns:p14="http://schemas.microsoft.com/office/powerpoint/2010/main" val="1366641934"/>
+        <p14:creationId xmlns:p14="http://schemas.microsoft.com/office/powerpoint/2010/main" val="1619744340"/>
       </p:ext>
     </p:extLst>
   </p:cSld>
